--- a/04_presentations/01_powerpoint/04_Jeroen_Ellen_Axel_17-03-25.pptx
+++ b/04_presentations/01_powerpoint/04_Jeroen_Ellen_Axel_17-03-25.pptx
@@ -10,7 +10,17 @@
     <p:sldId id="261" r:id="rId4"/>
     <p:sldId id="259" r:id="rId5"/>
     <p:sldId id="260" r:id="rId6"/>
-    <p:sldId id="257" r:id="rId7"/>
+    <p:sldId id="262" r:id="rId7"/>
+    <p:sldId id="257" r:id="rId8"/>
+    <p:sldId id="263" r:id="rId9"/>
+    <p:sldId id="269" r:id="rId10"/>
+    <p:sldId id="266" r:id="rId11"/>
+    <p:sldId id="264" r:id="rId12"/>
+    <p:sldId id="265" r:id="rId13"/>
+    <p:sldId id="270" r:id="rId14"/>
+    <p:sldId id="271" r:id="rId15"/>
+    <p:sldId id="267" r:id="rId16"/>
+    <p:sldId id="268" r:id="rId17"/>
   </p:sldIdLst>
   <p:sldSz cx="12192000" cy="6858000"/>
   <p:notesSz cx="6858000" cy="9144000"/>
@@ -109,6 +119,11 @@
       </a:defRPr>
     </a:lvl9pPr>
   </p:defaultTextStyle>
+  <p:extLst>
+    <p:ext uri="{EFAFB233-063F-42B5-8137-9DF3F51BA10A}">
+      <p15:sldGuideLst xmlns:p15="http://schemas.microsoft.com/office/powerpoint/2012/main"/>
+    </p:ext>
+  </p:extLst>
 </p:presentation>
 </file>
 
@@ -259,7 +274,7 @@
           <a:p>
             <a:fld id="{5C1C5790-ED67-4BB7-8607-EA1DCC2EAB8A}" type="datetimeFigureOut">
               <a:rPr lang="en-US" smtClean="0"/>
-              <a:t>3/17/2026</a:t>
+              <a:t>3/18/2026</a:t>
             </a:fld>
             <a:endParaRPr lang="en-US"/>
           </a:p>
@@ -457,7 +472,7 @@
           <a:p>
             <a:fld id="{5C1C5790-ED67-4BB7-8607-EA1DCC2EAB8A}" type="datetimeFigureOut">
               <a:rPr lang="en-US" smtClean="0"/>
-              <a:t>3/17/2026</a:t>
+              <a:t>3/18/2026</a:t>
             </a:fld>
             <a:endParaRPr lang="en-US"/>
           </a:p>
@@ -665,7 +680,7 @@
           <a:p>
             <a:fld id="{5C1C5790-ED67-4BB7-8607-EA1DCC2EAB8A}" type="datetimeFigureOut">
               <a:rPr lang="en-US" smtClean="0"/>
-              <a:t>3/17/2026</a:t>
+              <a:t>3/18/2026</a:t>
             </a:fld>
             <a:endParaRPr lang="en-US"/>
           </a:p>
@@ -863,7 +878,7 @@
           <a:p>
             <a:fld id="{5C1C5790-ED67-4BB7-8607-EA1DCC2EAB8A}" type="datetimeFigureOut">
               <a:rPr lang="en-US" smtClean="0"/>
-              <a:t>3/17/2026</a:t>
+              <a:t>3/18/2026</a:t>
             </a:fld>
             <a:endParaRPr lang="en-US"/>
           </a:p>
@@ -1138,7 +1153,7 @@
           <a:p>
             <a:fld id="{5C1C5790-ED67-4BB7-8607-EA1DCC2EAB8A}" type="datetimeFigureOut">
               <a:rPr lang="en-US" smtClean="0"/>
-              <a:t>3/17/2026</a:t>
+              <a:t>3/18/2026</a:t>
             </a:fld>
             <a:endParaRPr lang="en-US"/>
           </a:p>
@@ -1403,7 +1418,7 @@
           <a:p>
             <a:fld id="{5C1C5790-ED67-4BB7-8607-EA1DCC2EAB8A}" type="datetimeFigureOut">
               <a:rPr lang="en-US" smtClean="0"/>
-              <a:t>3/17/2026</a:t>
+              <a:t>3/18/2026</a:t>
             </a:fld>
             <a:endParaRPr lang="en-US"/>
           </a:p>
@@ -1815,7 +1830,7 @@
           <a:p>
             <a:fld id="{5C1C5790-ED67-4BB7-8607-EA1DCC2EAB8A}" type="datetimeFigureOut">
               <a:rPr lang="en-US" smtClean="0"/>
-              <a:t>3/17/2026</a:t>
+              <a:t>3/18/2026</a:t>
             </a:fld>
             <a:endParaRPr lang="en-US"/>
           </a:p>
@@ -1956,7 +1971,7 @@
           <a:p>
             <a:fld id="{5C1C5790-ED67-4BB7-8607-EA1DCC2EAB8A}" type="datetimeFigureOut">
               <a:rPr lang="en-US" smtClean="0"/>
-              <a:t>3/17/2026</a:t>
+              <a:t>3/18/2026</a:t>
             </a:fld>
             <a:endParaRPr lang="en-US"/>
           </a:p>
@@ -2069,7 +2084,7 @@
           <a:p>
             <a:fld id="{5C1C5790-ED67-4BB7-8607-EA1DCC2EAB8A}" type="datetimeFigureOut">
               <a:rPr lang="en-US" smtClean="0"/>
-              <a:t>3/17/2026</a:t>
+              <a:t>3/18/2026</a:t>
             </a:fld>
             <a:endParaRPr lang="en-US"/>
           </a:p>
@@ -2380,7 +2395,7 @@
           <a:p>
             <a:fld id="{5C1C5790-ED67-4BB7-8607-EA1DCC2EAB8A}" type="datetimeFigureOut">
               <a:rPr lang="en-US" smtClean="0"/>
-              <a:t>3/17/2026</a:t>
+              <a:t>3/18/2026</a:t>
             </a:fld>
             <a:endParaRPr lang="en-US"/>
           </a:p>
@@ -2668,7 +2683,7 @@
           <a:p>
             <a:fld id="{5C1C5790-ED67-4BB7-8607-EA1DCC2EAB8A}" type="datetimeFigureOut">
               <a:rPr lang="en-US" smtClean="0"/>
-              <a:t>3/17/2026</a:t>
+              <a:t>3/18/2026</a:t>
             </a:fld>
             <a:endParaRPr lang="en-US"/>
           </a:p>
@@ -2909,7 +2924,7 @@
           <a:p>
             <a:fld id="{5C1C5790-ED67-4BB7-8607-EA1DCC2EAB8A}" type="datetimeFigureOut">
               <a:rPr lang="en-US" smtClean="0"/>
-              <a:t>3/17/2026</a:t>
+              <a:t>3/18/2026</a:t>
             </a:fld>
             <a:endParaRPr lang="en-US"/>
           </a:p>
@@ -3395,6 +3410,2590 @@
 </p:sld>
 </file>
 
+<file path=ppt/slides/slide10.xml><?xml version="1.0" encoding="utf-8"?>
+<p:sld xmlns:a="http://schemas.openxmlformats.org/drawingml/2006/main" xmlns:r="http://schemas.openxmlformats.org/officeDocument/2006/relationships" xmlns:p="http://schemas.openxmlformats.org/presentationml/2006/main">
+  <p:cSld>
+    <p:spTree>
+      <p:nvGrpSpPr>
+        <p:cNvPr id="1" name=""/>
+        <p:cNvGrpSpPr/>
+        <p:nvPr/>
+      </p:nvGrpSpPr>
+      <p:grpSpPr>
+        <a:xfrm>
+          <a:off x="0" y="0"/>
+          <a:ext cx="0" cy="0"/>
+          <a:chOff x="0" y="0"/>
+          <a:chExt cx="0" cy="0"/>
+        </a:xfrm>
+      </p:grpSpPr>
+      <p:sp>
+        <p:nvSpPr>
+          <p:cNvPr id="2" name="Title 1">
+            <a:extLst>
+              <a:ext uri="{FF2B5EF4-FFF2-40B4-BE49-F238E27FC236}">
+                <a16:creationId xmlns:a16="http://schemas.microsoft.com/office/drawing/2014/main" id="{C3FA0AB5-D95D-36F1-D08B-161014607D99}"/>
+              </a:ext>
+            </a:extLst>
+          </p:cNvPr>
+          <p:cNvSpPr>
+            <a:spLocks noGrp="1"/>
+          </p:cNvSpPr>
+          <p:nvPr>
+            <p:ph type="title"/>
+          </p:nvPr>
+        </p:nvSpPr>
+        <p:spPr/>
+        <p:txBody>
+          <a:bodyPr/>
+          <a:lstStyle/>
+          <a:p>
+            <a:r>
+              <a:rPr lang="en-US" dirty="0"/>
+              <a:t>The delta matrix</a:t>
+            </a:r>
+          </a:p>
+        </p:txBody>
+      </p:sp>
+      <p:pic>
+        <p:nvPicPr>
+          <p:cNvPr id="9" name="Picture 8">
+            <a:extLst>
+              <a:ext uri="{FF2B5EF4-FFF2-40B4-BE49-F238E27FC236}">
+                <a16:creationId xmlns:a16="http://schemas.microsoft.com/office/drawing/2014/main" id="{AF326B68-6FA6-41BD-326A-FD4712CFEA4E}"/>
+              </a:ext>
+            </a:extLst>
+          </p:cNvPr>
+          <p:cNvPicPr>
+            <a:picLocks noChangeAspect="1"/>
+          </p:cNvPicPr>
+          <p:nvPr/>
+        </p:nvPicPr>
+        <p:blipFill>
+          <a:blip r:embed="rId2">
+            <a:extLst>
+              <a:ext uri="{28A0092B-C50C-407E-A947-70E740481C1C}">
+                <a14:useLocalDpi xmlns:a14="http://schemas.microsoft.com/office/drawing/2010/main" val="0"/>
+              </a:ext>
+            </a:extLst>
+          </a:blip>
+          <a:stretch>
+            <a:fillRect/>
+          </a:stretch>
+        </p:blipFill>
+        <p:spPr>
+          <a:xfrm>
+            <a:off x="697209" y="1454216"/>
+            <a:ext cx="7763398" cy="4852124"/>
+          </a:xfrm>
+          <a:prstGeom prst="rect">
+            <a:avLst/>
+          </a:prstGeom>
+        </p:spPr>
+      </p:pic>
+    </p:spTree>
+    <p:extLst>
+      <p:ext uri="{BB962C8B-B14F-4D97-AF65-F5344CB8AC3E}">
+        <p14:creationId xmlns:p14="http://schemas.microsoft.com/office/powerpoint/2010/main" val="624135945"/>
+      </p:ext>
+    </p:extLst>
+  </p:cSld>
+  <p:clrMapOvr>
+    <a:masterClrMapping/>
+  </p:clrMapOvr>
+</p:sld>
+</file>
+
+<file path=ppt/slides/slide11.xml><?xml version="1.0" encoding="utf-8"?>
+<p:sld xmlns:a="http://schemas.openxmlformats.org/drawingml/2006/main" xmlns:r="http://schemas.openxmlformats.org/officeDocument/2006/relationships" xmlns:p="http://schemas.openxmlformats.org/presentationml/2006/main">
+  <p:cSld>
+    <p:spTree>
+      <p:nvGrpSpPr>
+        <p:cNvPr id="1" name=""/>
+        <p:cNvGrpSpPr/>
+        <p:nvPr/>
+      </p:nvGrpSpPr>
+      <p:grpSpPr>
+        <a:xfrm>
+          <a:off x="0" y="0"/>
+          <a:ext cx="0" cy="0"/>
+          <a:chOff x="0" y="0"/>
+          <a:chExt cx="0" cy="0"/>
+        </a:xfrm>
+      </p:grpSpPr>
+      <p:sp>
+        <p:nvSpPr>
+          <p:cNvPr id="2" name="Title 1">
+            <a:extLst>
+              <a:ext uri="{FF2B5EF4-FFF2-40B4-BE49-F238E27FC236}">
+                <a16:creationId xmlns:a16="http://schemas.microsoft.com/office/drawing/2014/main" id="{8B879636-CA8C-BCEA-1604-9286FDC7E3EE}"/>
+              </a:ext>
+            </a:extLst>
+          </p:cNvPr>
+          <p:cNvSpPr>
+            <a:spLocks noGrp="1"/>
+          </p:cNvSpPr>
+          <p:nvPr>
+            <p:ph type="title"/>
+          </p:nvPr>
+        </p:nvSpPr>
+        <p:spPr/>
+        <p:txBody>
+          <a:bodyPr/>
+          <a:lstStyle/>
+          <a:p>
+            <a:r>
+              <a:rPr lang="en-US" dirty="0"/>
+              <a:t>BCA</a:t>
+            </a:r>
+          </a:p>
+        </p:txBody>
+      </p:sp>
+      <p:sp>
+        <p:nvSpPr>
+          <p:cNvPr id="3" name="Content Placeholder 2">
+            <a:extLst>
+              <a:ext uri="{FF2B5EF4-FFF2-40B4-BE49-F238E27FC236}">
+                <a16:creationId xmlns:a16="http://schemas.microsoft.com/office/drawing/2014/main" id="{0C9DA94B-7972-39C4-E4F7-DC0CB0D248F2}"/>
+              </a:ext>
+            </a:extLst>
+          </p:cNvPr>
+          <p:cNvSpPr>
+            <a:spLocks noGrp="1"/>
+          </p:cNvSpPr>
+          <p:nvPr>
+            <p:ph idx="1"/>
+          </p:nvPr>
+        </p:nvSpPr>
+        <p:spPr/>
+        <p:txBody>
+          <a:bodyPr/>
+          <a:lstStyle/>
+          <a:p>
+            <a:r>
+              <a:rPr lang="en-US" dirty="0"/>
+              <a:t>Model capacity: bias variance trade-off.</a:t>
+            </a:r>
+          </a:p>
+          <a:p>
+            <a:pPr lvl="1"/>
+            <a:r>
+              <a:rPr lang="en-US" dirty="0" err="1"/>
+              <a:t>Xgboost</a:t>
+            </a:r>
+            <a:endParaRPr lang="en-US" dirty="0"/>
+          </a:p>
+          <a:p>
+            <a:pPr lvl="1"/>
+            <a:r>
+              <a:rPr lang="en-US" dirty="0"/>
+              <a:t>TBA: Lasso regression</a:t>
+            </a:r>
+          </a:p>
+          <a:p>
+            <a:pPr lvl="1"/>
+            <a:r>
+              <a:rPr lang="en-US" dirty="0"/>
+              <a:t>TBA: </a:t>
+            </a:r>
+            <a:r>
+              <a:rPr lang="en-US" dirty="0" err="1"/>
+              <a:t>TabPFN</a:t>
+            </a:r>
+            <a:endParaRPr lang="en-US" dirty="0"/>
+          </a:p>
+          <a:p>
+            <a:pPr marL="0" indent="0">
+              <a:buNone/>
+            </a:pPr>
+            <a:endParaRPr lang="en-US" dirty="0"/>
+          </a:p>
+          <a:p>
+            <a:r>
+              <a:rPr lang="en-US" dirty="0"/>
+              <a:t>Bootstrap </a:t>
+            </a:r>
+            <a:r>
+              <a:rPr lang="en-US" dirty="0" err="1"/>
+              <a:t>s.e.</a:t>
+            </a:r>
+            <a:r>
+              <a:rPr lang="en-US" dirty="0"/>
+              <a:t> estimates. </a:t>
+            </a:r>
+          </a:p>
+          <a:p>
+            <a:pPr marL="0" indent="0">
+              <a:buNone/>
+            </a:pPr>
+            <a:endParaRPr lang="en-US" dirty="0"/>
+          </a:p>
+        </p:txBody>
+      </p:sp>
+    </p:spTree>
+    <p:extLst>
+      <p:ext uri="{BB962C8B-B14F-4D97-AF65-F5344CB8AC3E}">
+        <p14:creationId xmlns:p14="http://schemas.microsoft.com/office/powerpoint/2010/main" val="1224543206"/>
+      </p:ext>
+    </p:extLst>
+  </p:cSld>
+  <p:clrMapOvr>
+    <a:masterClrMapping/>
+  </p:clrMapOvr>
+</p:sld>
+</file>
+
+<file path=ppt/slides/slide12.xml><?xml version="1.0" encoding="utf-8"?>
+<p:sld xmlns:a="http://schemas.openxmlformats.org/drawingml/2006/main" xmlns:r="http://schemas.openxmlformats.org/officeDocument/2006/relationships" xmlns:p="http://schemas.openxmlformats.org/presentationml/2006/main">
+  <p:cSld>
+    <p:spTree>
+      <p:nvGrpSpPr>
+        <p:cNvPr id="1" name=""/>
+        <p:cNvGrpSpPr/>
+        <p:nvPr/>
+      </p:nvGrpSpPr>
+      <p:grpSpPr>
+        <a:xfrm>
+          <a:off x="0" y="0"/>
+          <a:ext cx="0" cy="0"/>
+          <a:chOff x="0" y="0"/>
+          <a:chExt cx="0" cy="0"/>
+        </a:xfrm>
+      </p:grpSpPr>
+      <p:sp>
+        <p:nvSpPr>
+          <p:cNvPr id="2" name="Title 1">
+            <a:extLst>
+              <a:ext uri="{FF2B5EF4-FFF2-40B4-BE49-F238E27FC236}">
+                <a16:creationId xmlns:a16="http://schemas.microsoft.com/office/drawing/2014/main" id="{35313B1F-F55A-27D3-6EAC-117FCA0DF38B}"/>
+              </a:ext>
+            </a:extLst>
+          </p:cNvPr>
+          <p:cNvSpPr>
+            <a:spLocks noGrp="1"/>
+          </p:cNvSpPr>
+          <p:nvPr>
+            <p:ph type="title"/>
+          </p:nvPr>
+        </p:nvSpPr>
+        <p:spPr/>
+        <p:txBody>
+          <a:bodyPr/>
+          <a:lstStyle/>
+          <a:p>
+            <a:r>
+              <a:rPr lang="en-US" dirty="0"/>
+              <a:t>SEM</a:t>
+            </a:r>
+          </a:p>
+        </p:txBody>
+      </p:sp>
+      <p:sp>
+        <p:nvSpPr>
+          <p:cNvPr id="3" name="Content Placeholder 2">
+            <a:extLst>
+              <a:ext uri="{FF2B5EF4-FFF2-40B4-BE49-F238E27FC236}">
+                <a16:creationId xmlns:a16="http://schemas.microsoft.com/office/drawing/2014/main" id="{8B7A18B2-2BCA-EE4D-2959-142393CD1B72}"/>
+              </a:ext>
+            </a:extLst>
+          </p:cNvPr>
+          <p:cNvSpPr>
+            <a:spLocks noGrp="1"/>
+          </p:cNvSpPr>
+          <p:nvPr>
+            <p:ph idx="1"/>
+          </p:nvPr>
+        </p:nvSpPr>
+        <p:spPr/>
+        <p:txBody>
+          <a:bodyPr/>
+          <a:lstStyle/>
+          <a:p>
+            <a:r>
+              <a:rPr lang="en-US" dirty="0"/>
+              <a:t>RICLPM</a:t>
+            </a:r>
+          </a:p>
+          <a:p>
+            <a:r>
+              <a:rPr lang="en-US" dirty="0"/>
+              <a:t>DPM</a:t>
+            </a:r>
+          </a:p>
+        </p:txBody>
+      </p:sp>
+    </p:spTree>
+    <p:extLst>
+      <p:ext uri="{BB962C8B-B14F-4D97-AF65-F5344CB8AC3E}">
+        <p14:creationId xmlns:p14="http://schemas.microsoft.com/office/powerpoint/2010/main" val="4215191223"/>
+      </p:ext>
+    </p:extLst>
+  </p:cSld>
+  <p:clrMapOvr>
+    <a:masterClrMapping/>
+  </p:clrMapOvr>
+</p:sld>
+</file>
+
+<file path=ppt/slides/slide13.xml><?xml version="1.0" encoding="utf-8"?>
+<p:sld xmlns:a="http://schemas.openxmlformats.org/drawingml/2006/main" xmlns:r="http://schemas.openxmlformats.org/officeDocument/2006/relationships" xmlns:p="http://schemas.openxmlformats.org/presentationml/2006/main">
+  <p:cSld>
+    <p:spTree>
+      <p:nvGrpSpPr>
+        <p:cNvPr id="1" name=""/>
+        <p:cNvGrpSpPr/>
+        <p:nvPr/>
+      </p:nvGrpSpPr>
+      <p:grpSpPr>
+        <a:xfrm>
+          <a:off x="0" y="0"/>
+          <a:ext cx="0" cy="0"/>
+          <a:chOff x="0" y="0"/>
+          <a:chExt cx="0" cy="0"/>
+        </a:xfrm>
+      </p:grpSpPr>
+      <p:sp>
+        <p:nvSpPr>
+          <p:cNvPr id="2" name="Title 1">
+            <a:extLst>
+              <a:ext uri="{FF2B5EF4-FFF2-40B4-BE49-F238E27FC236}">
+                <a16:creationId xmlns:a16="http://schemas.microsoft.com/office/drawing/2014/main" id="{1FEBE01B-2838-1B5E-A4E5-CD745D2DA582}"/>
+              </a:ext>
+            </a:extLst>
+          </p:cNvPr>
+          <p:cNvSpPr>
+            <a:spLocks noGrp="1"/>
+          </p:cNvSpPr>
+          <p:nvPr>
+            <p:ph type="title"/>
+          </p:nvPr>
+        </p:nvSpPr>
+        <p:spPr/>
+        <p:txBody>
+          <a:bodyPr/>
+          <a:lstStyle/>
+          <a:p>
+            <a:endParaRPr lang="en-US"/>
+          </a:p>
+        </p:txBody>
+      </p:sp>
+      <p:pic>
+        <p:nvPicPr>
+          <p:cNvPr id="5" name="Content Placeholder 4">
+            <a:extLst>
+              <a:ext uri="{FF2B5EF4-FFF2-40B4-BE49-F238E27FC236}">
+                <a16:creationId xmlns:a16="http://schemas.microsoft.com/office/drawing/2014/main" id="{A5D466E8-089D-9E2C-525C-2D4CA5456BBA}"/>
+              </a:ext>
+            </a:extLst>
+          </p:cNvPr>
+          <p:cNvPicPr>
+            <a:picLocks noGrp="1" noChangeAspect="1"/>
+          </p:cNvPicPr>
+          <p:nvPr>
+            <p:ph idx="1"/>
+          </p:nvPr>
+        </p:nvPicPr>
+        <p:blipFill>
+          <a:blip r:embed="rId2">
+            <a:extLst>
+              <a:ext uri="{28A0092B-C50C-407E-A947-70E740481C1C}">
+                <a14:useLocalDpi xmlns:a14="http://schemas.microsoft.com/office/drawing/2010/main" val="0"/>
+              </a:ext>
+            </a:extLst>
+          </a:blip>
+          <a:stretch>
+            <a:fillRect/>
+          </a:stretch>
+        </p:blipFill>
+        <p:spPr>
+          <a:xfrm rot="16200000">
+            <a:off x="2046600" y="-4016062"/>
+            <a:ext cx="7551654" cy="13312213"/>
+          </a:xfrm>
+          <a:prstGeom prst="rect">
+            <a:avLst/>
+          </a:prstGeom>
+        </p:spPr>
+      </p:pic>
+    </p:spTree>
+    <p:extLst>
+      <p:ext uri="{BB962C8B-B14F-4D97-AF65-F5344CB8AC3E}">
+        <p14:creationId xmlns:p14="http://schemas.microsoft.com/office/powerpoint/2010/main" val="498384059"/>
+      </p:ext>
+    </p:extLst>
+  </p:cSld>
+  <p:clrMapOvr>
+    <a:masterClrMapping/>
+  </p:clrMapOvr>
+</p:sld>
+</file>
+
+<file path=ppt/slides/slide14.xml><?xml version="1.0" encoding="utf-8"?>
+<p:sld xmlns:a="http://schemas.openxmlformats.org/drawingml/2006/main" xmlns:r="http://schemas.openxmlformats.org/officeDocument/2006/relationships" xmlns:p="http://schemas.openxmlformats.org/presentationml/2006/main">
+  <p:cSld>
+    <p:spTree>
+      <p:nvGrpSpPr>
+        <p:cNvPr id="1" name=""/>
+        <p:cNvGrpSpPr/>
+        <p:nvPr/>
+      </p:nvGrpSpPr>
+      <p:grpSpPr>
+        <a:xfrm>
+          <a:off x="0" y="0"/>
+          <a:ext cx="0" cy="0"/>
+          <a:chOff x="0" y="0"/>
+          <a:chExt cx="0" cy="0"/>
+        </a:xfrm>
+      </p:grpSpPr>
+      <p:sp>
+        <p:nvSpPr>
+          <p:cNvPr id="2" name="Title 1">
+            <a:extLst>
+              <a:ext uri="{FF2B5EF4-FFF2-40B4-BE49-F238E27FC236}">
+                <a16:creationId xmlns:a16="http://schemas.microsoft.com/office/drawing/2014/main" id="{4157E8BC-446A-5F90-E8DB-E31E29C2A62D}"/>
+              </a:ext>
+            </a:extLst>
+          </p:cNvPr>
+          <p:cNvSpPr>
+            <a:spLocks noGrp="1"/>
+          </p:cNvSpPr>
+          <p:nvPr>
+            <p:ph type="title"/>
+          </p:nvPr>
+        </p:nvSpPr>
+        <p:spPr/>
+        <p:txBody>
+          <a:bodyPr/>
+          <a:lstStyle/>
+          <a:p>
+            <a:endParaRPr lang="en-US"/>
+          </a:p>
+        </p:txBody>
+      </p:sp>
+      <p:pic>
+        <p:nvPicPr>
+          <p:cNvPr id="8" name="Content Placeholder 7">
+            <a:extLst>
+              <a:ext uri="{FF2B5EF4-FFF2-40B4-BE49-F238E27FC236}">
+                <a16:creationId xmlns:a16="http://schemas.microsoft.com/office/drawing/2014/main" id="{DFA29248-C552-842A-31F2-FE97839A110A}"/>
+              </a:ext>
+            </a:extLst>
+          </p:cNvPr>
+          <p:cNvPicPr>
+            <a:picLocks noGrp="1" noChangeAspect="1"/>
+          </p:cNvPicPr>
+          <p:nvPr>
+            <p:ph idx="1"/>
+          </p:nvPr>
+        </p:nvPicPr>
+        <p:blipFill>
+          <a:blip r:embed="rId2">
+            <a:extLst>
+              <a:ext uri="{28A0092B-C50C-407E-A947-70E740481C1C}">
+                <a14:useLocalDpi xmlns:a14="http://schemas.microsoft.com/office/drawing/2010/main" val="0"/>
+              </a:ext>
+            </a:extLst>
+          </a:blip>
+          <a:stretch>
+            <a:fillRect/>
+          </a:stretch>
+        </p:blipFill>
+        <p:spPr>
+          <a:xfrm rot="16200000">
+            <a:off x="838200" y="365125"/>
+            <a:ext cx="7256050" cy="7256050"/>
+          </a:xfrm>
+          <a:prstGeom prst="rect">
+            <a:avLst/>
+          </a:prstGeom>
+        </p:spPr>
+      </p:pic>
+    </p:spTree>
+    <p:extLst>
+      <p:ext uri="{BB962C8B-B14F-4D97-AF65-F5344CB8AC3E}">
+        <p14:creationId xmlns:p14="http://schemas.microsoft.com/office/powerpoint/2010/main" val="3208346099"/>
+      </p:ext>
+    </p:extLst>
+  </p:cSld>
+  <p:clrMapOvr>
+    <a:masterClrMapping/>
+  </p:clrMapOvr>
+</p:sld>
+</file>
+
+<file path=ppt/slides/slide15.xml><?xml version="1.0" encoding="utf-8"?>
+<p:sld xmlns:a="http://schemas.openxmlformats.org/drawingml/2006/main" xmlns:r="http://schemas.openxmlformats.org/officeDocument/2006/relationships" xmlns:p="http://schemas.openxmlformats.org/presentationml/2006/main">
+  <p:cSld>
+    <p:spTree>
+      <p:nvGrpSpPr>
+        <p:cNvPr id="1" name=""/>
+        <p:cNvGrpSpPr/>
+        <p:nvPr/>
+      </p:nvGrpSpPr>
+      <p:grpSpPr>
+        <a:xfrm>
+          <a:off x="0" y="0"/>
+          <a:ext cx="0" cy="0"/>
+          <a:chOff x="0" y="0"/>
+          <a:chExt cx="0" cy="0"/>
+        </a:xfrm>
+      </p:grpSpPr>
+      <p:sp>
+        <p:nvSpPr>
+          <p:cNvPr id="2" name="Title 1">
+            <a:extLst>
+              <a:ext uri="{FF2B5EF4-FFF2-40B4-BE49-F238E27FC236}">
+                <a16:creationId xmlns:a16="http://schemas.microsoft.com/office/drawing/2014/main" id="{53002057-6FFF-BFE6-024D-271C19A0B16E}"/>
+              </a:ext>
+            </a:extLst>
+          </p:cNvPr>
+          <p:cNvSpPr>
+            <a:spLocks noGrp="1"/>
+          </p:cNvSpPr>
+          <p:nvPr>
+            <p:ph type="title"/>
+          </p:nvPr>
+        </p:nvSpPr>
+        <p:spPr>
+          <a:xfrm>
+            <a:off x="606323" y="354367"/>
+            <a:ext cx="10515600" cy="1325563"/>
+          </a:xfrm>
+        </p:spPr>
+        <p:txBody>
+          <a:bodyPr/>
+          <a:lstStyle/>
+          <a:p>
+            <a:r>
+              <a:rPr lang="en-US" dirty="0"/>
+              <a:t>Sim studies (1)</a:t>
+            </a:r>
+          </a:p>
+        </p:txBody>
+      </p:sp>
+      <p:graphicFrame>
+        <p:nvGraphicFramePr>
+          <p:cNvPr id="4" name="Table 3">
+            <a:extLst>
+              <a:ext uri="{FF2B5EF4-FFF2-40B4-BE49-F238E27FC236}">
+                <a16:creationId xmlns:a16="http://schemas.microsoft.com/office/drawing/2014/main" id="{E8A6D4E9-61D2-CFED-F319-4564FB6A6CE3}"/>
+              </a:ext>
+            </a:extLst>
+          </p:cNvPr>
+          <p:cNvGraphicFramePr>
+            <a:graphicFrameLocks noGrp="1"/>
+          </p:cNvGraphicFramePr>
+          <p:nvPr>
+            <p:extLst>
+              <p:ext uri="{D42A27DB-BD31-4B8C-83A1-F6EECF244321}">
+                <p14:modId xmlns:p14="http://schemas.microsoft.com/office/powerpoint/2010/main" val="2176079966"/>
+              </p:ext>
+            </p:extLst>
+          </p:nvPr>
+        </p:nvGraphicFramePr>
+        <p:xfrm>
+          <a:off x="606323" y="1390771"/>
+          <a:ext cx="10504129" cy="4450080"/>
+        </p:xfrm>
+        <a:graphic>
+          <a:graphicData uri="http://schemas.openxmlformats.org/drawingml/2006/table">
+            <a:tbl>
+              <a:tblPr firstRow="1" bandRow="1">
+                <a:tableStyleId>{5C22544A-7EE6-4342-B048-85BDC9FD1C3A}</a:tableStyleId>
+              </a:tblPr>
+              <a:tblGrid>
+                <a:gridCol w="1763251">
+                  <a:extLst>
+                    <a:ext uri="{9D8B030D-6E8A-4147-A177-3AD203B41FA5}">
+                      <a16:colId xmlns:a16="http://schemas.microsoft.com/office/drawing/2014/main" val="2001065591"/>
+                    </a:ext>
+                  </a:extLst>
+                </a:gridCol>
+                <a:gridCol w="1757768">
+                  <a:extLst>
+                    <a:ext uri="{9D8B030D-6E8A-4147-A177-3AD203B41FA5}">
+                      <a16:colId xmlns:a16="http://schemas.microsoft.com/office/drawing/2014/main" val="2433874881"/>
+                    </a:ext>
+                  </a:extLst>
+                </a:gridCol>
+                <a:gridCol w="1123084">
+                  <a:extLst>
+                    <a:ext uri="{9D8B030D-6E8A-4147-A177-3AD203B41FA5}">
+                      <a16:colId xmlns:a16="http://schemas.microsoft.com/office/drawing/2014/main" val="3464504445"/>
+                    </a:ext>
+                  </a:extLst>
+                </a:gridCol>
+                <a:gridCol w="1484671">
+                  <a:extLst>
+                    <a:ext uri="{9D8B030D-6E8A-4147-A177-3AD203B41FA5}">
+                      <a16:colId xmlns:a16="http://schemas.microsoft.com/office/drawing/2014/main" val="214330825"/>
+                    </a:ext>
+                  </a:extLst>
+                </a:gridCol>
+                <a:gridCol w="1533832">
+                  <a:extLst>
+                    <a:ext uri="{9D8B030D-6E8A-4147-A177-3AD203B41FA5}">
+                      <a16:colId xmlns:a16="http://schemas.microsoft.com/office/drawing/2014/main" val="3653818921"/>
+                    </a:ext>
+                  </a:extLst>
+                </a:gridCol>
+                <a:gridCol w="2841523">
+                  <a:extLst>
+                    <a:ext uri="{9D8B030D-6E8A-4147-A177-3AD203B41FA5}">
+                      <a16:colId xmlns:a16="http://schemas.microsoft.com/office/drawing/2014/main" val="248906913"/>
+                    </a:ext>
+                  </a:extLst>
+                </a:gridCol>
+              </a:tblGrid>
+              <a:tr h="370840">
+                <a:tc>
+                  <a:txBody>
+                    <a:bodyPr/>
+                    <a:lstStyle/>
+                    <a:p>
+                      <a:r>
+                        <a:rPr lang="en-US" dirty="0"/>
+                        <a:t>Model</a:t>
+                      </a:r>
+                    </a:p>
+                  </a:txBody>
+                  <a:tcPr/>
+                </a:tc>
+                <a:tc>
+                  <a:txBody>
+                    <a:bodyPr/>
+                    <a:lstStyle/>
+                    <a:p>
+                      <a:r>
+                        <a:rPr lang="en-US" dirty="0"/>
+                        <a:t>Delta station.</a:t>
+                      </a:r>
+                    </a:p>
+                  </a:txBody>
+                  <a:tcPr/>
+                </a:tc>
+                <a:tc>
+                  <a:txBody>
+                    <a:bodyPr/>
+                    <a:lstStyle/>
+                    <a:p>
+                      <a:r>
+                        <a:rPr lang="en-US" dirty="0"/>
+                        <a:t>Linearity</a:t>
+                      </a:r>
+                    </a:p>
+                  </a:txBody>
+                  <a:tcPr/>
+                </a:tc>
+                <a:tc>
+                  <a:txBody>
+                    <a:bodyPr/>
+                    <a:lstStyle/>
+                    <a:p>
+                      <a:r>
+                        <a:rPr lang="en-US" dirty="0"/>
+                        <a:t>All observed</a:t>
+                      </a:r>
+                    </a:p>
+                  </a:txBody>
+                  <a:tcPr/>
+                </a:tc>
+                <a:tc>
+                  <a:txBody>
+                    <a:bodyPr/>
+                    <a:lstStyle/>
+                    <a:p>
+                      <a:r>
+                        <a:rPr lang="en-US" dirty="0"/>
+                        <a:t>Normality</a:t>
+                      </a:r>
+                    </a:p>
+                  </a:txBody>
+                  <a:tcPr>
+                    <a:solidFill>
+                      <a:schemeClr val="bg2"/>
+                    </a:solidFill>
+                  </a:tcPr>
+                </a:tc>
+                <a:tc>
+                  <a:txBody>
+                    <a:bodyPr/>
+                    <a:lstStyle/>
+                    <a:p>
+                      <a:r>
+                        <a:rPr lang="en-US" dirty="0"/>
+                        <a:t>Interest</a:t>
+                      </a:r>
+                    </a:p>
+                  </a:txBody>
+                  <a:tcPr/>
+                </a:tc>
+                <a:extLst>
+                  <a:ext uri="{0D108BD9-81ED-4DB2-BD59-A6C34878D82A}">
+                    <a16:rowId xmlns:a16="http://schemas.microsoft.com/office/drawing/2014/main" val="313456875"/>
+                  </a:ext>
+                </a:extLst>
+              </a:tr>
+              <a:tr h="370840">
+                <a:tc>
+                  <a:txBody>
+                    <a:bodyPr/>
+                    <a:lstStyle/>
+                    <a:p>
+                      <a:r>
+                        <a:rPr lang="en-US" dirty="0"/>
+                        <a:t>True</a:t>
+                      </a:r>
+                    </a:p>
+                  </a:txBody>
+                  <a:tcPr/>
+                </a:tc>
+                <a:tc>
+                  <a:txBody>
+                    <a:bodyPr/>
+                    <a:lstStyle/>
+                    <a:p>
+                      <a:endParaRPr lang="en-US" dirty="0"/>
+                    </a:p>
+                  </a:txBody>
+                  <a:tcPr/>
+                </a:tc>
+                <a:tc>
+                  <a:txBody>
+                    <a:bodyPr/>
+                    <a:lstStyle/>
+                    <a:p>
+                      <a:endParaRPr lang="en-US" dirty="0"/>
+                    </a:p>
+                  </a:txBody>
+                  <a:tcPr/>
+                </a:tc>
+                <a:tc>
+                  <a:txBody>
+                    <a:bodyPr/>
+                    <a:lstStyle/>
+                    <a:p>
+                      <a:endParaRPr lang="en-US" dirty="0"/>
+                    </a:p>
+                  </a:txBody>
+                  <a:tcPr/>
+                </a:tc>
+                <a:tc>
+                  <a:txBody>
+                    <a:bodyPr/>
+                    <a:lstStyle/>
+                    <a:p>
+                      <a:endParaRPr lang="en-US" dirty="0"/>
+                    </a:p>
+                  </a:txBody>
+                  <a:tcPr>
+                    <a:solidFill>
+                      <a:schemeClr val="bg2"/>
+                    </a:solidFill>
+                  </a:tcPr>
+                </a:tc>
+                <a:tc>
+                  <a:txBody>
+                    <a:bodyPr/>
+                    <a:lstStyle/>
+                    <a:p>
+                      <a:r>
+                        <a:rPr lang="en-US" dirty="0"/>
+                        <a:t>Upper bound</a:t>
+                      </a:r>
+                    </a:p>
+                  </a:txBody>
+                  <a:tcPr/>
+                </a:tc>
+                <a:extLst>
+                  <a:ext uri="{0D108BD9-81ED-4DB2-BD59-A6C34878D82A}">
+                    <a16:rowId xmlns:a16="http://schemas.microsoft.com/office/drawing/2014/main" val="928951641"/>
+                  </a:ext>
+                </a:extLst>
+              </a:tr>
+              <a:tr h="370840">
+                <a:tc>
+                  <a:txBody>
+                    <a:bodyPr/>
+                    <a:lstStyle/>
+                    <a:p>
+                      <a:r>
+                        <a:rPr lang="en-US" dirty="0"/>
+                        <a:t>Worse case</a:t>
+                      </a:r>
+                    </a:p>
+                  </a:txBody>
+                  <a:tcPr/>
+                </a:tc>
+                <a:tc>
+                  <a:txBody>
+                    <a:bodyPr/>
+                    <a:lstStyle/>
+                    <a:p>
+                      <a:endParaRPr lang="en-US"/>
+                    </a:p>
+                  </a:txBody>
+                  <a:tcPr/>
+                </a:tc>
+                <a:tc>
+                  <a:txBody>
+                    <a:bodyPr/>
+                    <a:lstStyle/>
+                    <a:p>
+                      <a:endParaRPr lang="en-US"/>
+                    </a:p>
+                  </a:txBody>
+                  <a:tcPr/>
+                </a:tc>
+                <a:tc>
+                  <a:txBody>
+                    <a:bodyPr/>
+                    <a:lstStyle/>
+                    <a:p>
+                      <a:endParaRPr lang="en-US"/>
+                    </a:p>
+                  </a:txBody>
+                  <a:tcPr/>
+                </a:tc>
+                <a:tc>
+                  <a:txBody>
+                    <a:bodyPr/>
+                    <a:lstStyle/>
+                    <a:p>
+                      <a:endParaRPr lang="en-US"/>
+                    </a:p>
+                  </a:txBody>
+                  <a:tcPr>
+                    <a:solidFill>
+                      <a:schemeClr val="bg2"/>
+                    </a:solidFill>
+                  </a:tcPr>
+                </a:tc>
+                <a:tc>
+                  <a:txBody>
+                    <a:bodyPr/>
+                    <a:lstStyle/>
+                    <a:p>
+                      <a:r>
+                        <a:rPr lang="en-US" dirty="0"/>
+                        <a:t>Lower bound</a:t>
+                      </a:r>
+                    </a:p>
+                  </a:txBody>
+                  <a:tcPr/>
+                </a:tc>
+                <a:extLst>
+                  <a:ext uri="{0D108BD9-81ED-4DB2-BD59-A6C34878D82A}">
+                    <a16:rowId xmlns:a16="http://schemas.microsoft.com/office/drawing/2014/main" val="522265642"/>
+                  </a:ext>
+                </a:extLst>
+              </a:tr>
+              <a:tr h="370840">
+                <a:tc>
+                  <a:txBody>
+                    <a:bodyPr/>
+                    <a:lstStyle/>
+                    <a:p>
+                      <a:endParaRPr lang="en-US" dirty="0"/>
+                    </a:p>
+                  </a:txBody>
+                  <a:tcPr/>
+                </a:tc>
+                <a:tc>
+                  <a:txBody>
+                    <a:bodyPr/>
+                    <a:lstStyle/>
+                    <a:p>
+                      <a:endParaRPr lang="en-US"/>
+                    </a:p>
+                  </a:txBody>
+                  <a:tcPr/>
+                </a:tc>
+                <a:tc>
+                  <a:txBody>
+                    <a:bodyPr/>
+                    <a:lstStyle/>
+                    <a:p>
+                      <a:endParaRPr lang="en-US" dirty="0"/>
+                    </a:p>
+                  </a:txBody>
+                  <a:tcPr/>
+                </a:tc>
+                <a:tc>
+                  <a:txBody>
+                    <a:bodyPr/>
+                    <a:lstStyle/>
+                    <a:p>
+                      <a:endParaRPr lang="en-US" dirty="0"/>
+                    </a:p>
+                  </a:txBody>
+                  <a:tcPr/>
+                </a:tc>
+                <a:tc>
+                  <a:txBody>
+                    <a:bodyPr/>
+                    <a:lstStyle/>
+                    <a:p>
+                      <a:endParaRPr lang="en-US" dirty="0"/>
+                    </a:p>
+                  </a:txBody>
+                  <a:tcPr>
+                    <a:solidFill>
+                      <a:schemeClr val="bg2"/>
+                    </a:solidFill>
+                  </a:tcPr>
+                </a:tc>
+                <a:tc>
+                  <a:txBody>
+                    <a:bodyPr/>
+                    <a:lstStyle/>
+                    <a:p>
+                      <a:endParaRPr lang="en-US"/>
+                    </a:p>
+                  </a:txBody>
+                  <a:tcPr/>
+                </a:tc>
+                <a:extLst>
+                  <a:ext uri="{0D108BD9-81ED-4DB2-BD59-A6C34878D82A}">
+                    <a16:rowId xmlns:a16="http://schemas.microsoft.com/office/drawing/2014/main" val="932761022"/>
+                  </a:ext>
+                </a:extLst>
+              </a:tr>
+              <a:tr h="370840">
+                <a:tc>
+                  <a:txBody>
+                    <a:bodyPr/>
+                    <a:lstStyle/>
+                    <a:p>
+                      <a:r>
+                        <a:rPr lang="en-US" dirty="0"/>
+                        <a:t>BCALM CLPM</a:t>
+                      </a:r>
+                    </a:p>
+                  </a:txBody>
+                  <a:tcPr/>
+                </a:tc>
+                <a:tc>
+                  <a:txBody>
+                    <a:bodyPr/>
+                    <a:lstStyle/>
+                    <a:p>
+                      <a:endParaRPr lang="en-US" dirty="0"/>
+                    </a:p>
+                  </a:txBody>
+                  <a:tcPr/>
+                </a:tc>
+                <a:tc>
+                  <a:txBody>
+                    <a:bodyPr/>
+                    <a:lstStyle/>
+                    <a:p>
+                      <a:endParaRPr lang="en-US" dirty="0"/>
+                    </a:p>
+                  </a:txBody>
+                  <a:tcPr/>
+                </a:tc>
+                <a:tc>
+                  <a:txBody>
+                    <a:bodyPr/>
+                    <a:lstStyle/>
+                    <a:p>
+                      <a:endParaRPr lang="en-US" dirty="0"/>
+                    </a:p>
+                  </a:txBody>
+                  <a:tcPr/>
+                </a:tc>
+                <a:tc>
+                  <a:txBody>
+                    <a:bodyPr/>
+                    <a:lstStyle/>
+                    <a:p>
+                      <a:endParaRPr lang="en-US" dirty="0"/>
+                    </a:p>
+                  </a:txBody>
+                  <a:tcPr>
+                    <a:solidFill>
+                      <a:schemeClr val="bg2"/>
+                    </a:solidFill>
+                  </a:tcPr>
+                </a:tc>
+                <a:tc>
+                  <a:txBody>
+                    <a:bodyPr/>
+                    <a:lstStyle/>
+                    <a:p>
+                      <a:endParaRPr lang="en-US" dirty="0"/>
+                    </a:p>
+                  </a:txBody>
+                  <a:tcPr/>
+                </a:tc>
+                <a:extLst>
+                  <a:ext uri="{0D108BD9-81ED-4DB2-BD59-A6C34878D82A}">
+                    <a16:rowId xmlns:a16="http://schemas.microsoft.com/office/drawing/2014/main" val="2421879190"/>
+                  </a:ext>
+                </a:extLst>
+              </a:tr>
+              <a:tr h="370840">
+                <a:tc>
+                  <a:txBody>
+                    <a:bodyPr/>
+                    <a:lstStyle/>
+                    <a:p>
+                      <a:r>
+                        <a:rPr lang="en-US" dirty="0"/>
+                        <a:t>BCAXGB CLPM</a:t>
+                      </a:r>
+                    </a:p>
+                  </a:txBody>
+                  <a:tcPr/>
+                </a:tc>
+                <a:tc>
+                  <a:txBody>
+                    <a:bodyPr/>
+                    <a:lstStyle/>
+                    <a:p>
+                      <a:endParaRPr lang="en-US" dirty="0"/>
+                    </a:p>
+                  </a:txBody>
+                  <a:tcPr/>
+                </a:tc>
+                <a:tc>
+                  <a:txBody>
+                    <a:bodyPr/>
+                    <a:lstStyle/>
+                    <a:p>
+                      <a:endParaRPr lang="en-US" dirty="0"/>
+                    </a:p>
+                  </a:txBody>
+                  <a:tcPr/>
+                </a:tc>
+                <a:tc>
+                  <a:txBody>
+                    <a:bodyPr/>
+                    <a:lstStyle/>
+                    <a:p>
+                      <a:endParaRPr lang="en-US" dirty="0"/>
+                    </a:p>
+                  </a:txBody>
+                  <a:tcPr/>
+                </a:tc>
+                <a:tc>
+                  <a:txBody>
+                    <a:bodyPr/>
+                    <a:lstStyle/>
+                    <a:p>
+                      <a:endParaRPr lang="en-US" dirty="0"/>
+                    </a:p>
+                  </a:txBody>
+                  <a:tcPr>
+                    <a:solidFill>
+                      <a:schemeClr val="bg2"/>
+                    </a:solidFill>
+                  </a:tcPr>
+                </a:tc>
+                <a:tc>
+                  <a:txBody>
+                    <a:bodyPr/>
+                    <a:lstStyle/>
+                    <a:p>
+                      <a:endParaRPr lang="en-US" dirty="0"/>
+                    </a:p>
+                  </a:txBody>
+                  <a:tcPr/>
+                </a:tc>
+                <a:extLst>
+                  <a:ext uri="{0D108BD9-81ED-4DB2-BD59-A6C34878D82A}">
+                    <a16:rowId xmlns:a16="http://schemas.microsoft.com/office/drawing/2014/main" val="2148181721"/>
+                  </a:ext>
+                </a:extLst>
+              </a:tr>
+              <a:tr h="370840">
+                <a:tc>
+                  <a:txBody>
+                    <a:bodyPr/>
+                    <a:lstStyle/>
+                    <a:p>
+                      <a:endParaRPr lang="en-US"/>
+                    </a:p>
+                  </a:txBody>
+                  <a:tcPr/>
+                </a:tc>
+                <a:tc>
+                  <a:txBody>
+                    <a:bodyPr/>
+                    <a:lstStyle/>
+                    <a:p>
+                      <a:endParaRPr lang="en-US"/>
+                    </a:p>
+                  </a:txBody>
+                  <a:tcPr/>
+                </a:tc>
+                <a:tc>
+                  <a:txBody>
+                    <a:bodyPr/>
+                    <a:lstStyle/>
+                    <a:p>
+                      <a:endParaRPr lang="en-US"/>
+                    </a:p>
+                  </a:txBody>
+                  <a:tcPr/>
+                </a:tc>
+                <a:tc>
+                  <a:txBody>
+                    <a:bodyPr/>
+                    <a:lstStyle/>
+                    <a:p>
+                      <a:endParaRPr lang="en-US" dirty="0"/>
+                    </a:p>
+                  </a:txBody>
+                  <a:tcPr/>
+                </a:tc>
+                <a:tc>
+                  <a:txBody>
+                    <a:bodyPr/>
+                    <a:lstStyle/>
+                    <a:p>
+                      <a:endParaRPr lang="en-US"/>
+                    </a:p>
+                  </a:txBody>
+                  <a:tcPr>
+                    <a:solidFill>
+                      <a:schemeClr val="bg2"/>
+                    </a:solidFill>
+                  </a:tcPr>
+                </a:tc>
+                <a:tc>
+                  <a:txBody>
+                    <a:bodyPr/>
+                    <a:lstStyle/>
+                    <a:p>
+                      <a:endParaRPr lang="en-US"/>
+                    </a:p>
+                  </a:txBody>
+                  <a:tcPr/>
+                </a:tc>
+                <a:extLst>
+                  <a:ext uri="{0D108BD9-81ED-4DB2-BD59-A6C34878D82A}">
+                    <a16:rowId xmlns:a16="http://schemas.microsoft.com/office/drawing/2014/main" val="1673032704"/>
+                  </a:ext>
+                </a:extLst>
+              </a:tr>
+              <a:tr h="370840">
+                <a:tc>
+                  <a:txBody>
+                    <a:bodyPr/>
+                    <a:lstStyle/>
+                    <a:p>
+                      <a:r>
+                        <a:rPr lang="en-US" dirty="0"/>
+                        <a:t>RICLPM</a:t>
+                      </a:r>
+                    </a:p>
+                  </a:txBody>
+                  <a:tcPr/>
+                </a:tc>
+                <a:tc>
+                  <a:txBody>
+                    <a:bodyPr/>
+                    <a:lstStyle/>
+                    <a:p>
+                      <a:endParaRPr lang="en-US" dirty="0"/>
+                    </a:p>
+                  </a:txBody>
+                  <a:tcPr/>
+                </a:tc>
+                <a:tc>
+                  <a:txBody>
+                    <a:bodyPr/>
+                    <a:lstStyle/>
+                    <a:p>
+                      <a:endParaRPr lang="en-US" dirty="0"/>
+                    </a:p>
+                  </a:txBody>
+                  <a:tcPr/>
+                </a:tc>
+                <a:tc>
+                  <a:txBody>
+                    <a:bodyPr/>
+                    <a:lstStyle/>
+                    <a:p>
+                      <a:endParaRPr lang="en-US" dirty="0"/>
+                    </a:p>
+                  </a:txBody>
+                  <a:tcPr/>
+                </a:tc>
+                <a:tc>
+                  <a:txBody>
+                    <a:bodyPr/>
+                    <a:lstStyle/>
+                    <a:p>
+                      <a:endParaRPr lang="en-US" dirty="0"/>
+                    </a:p>
+                  </a:txBody>
+                  <a:tcPr>
+                    <a:solidFill>
+                      <a:schemeClr val="bg2"/>
+                    </a:solidFill>
+                  </a:tcPr>
+                </a:tc>
+                <a:tc>
+                  <a:txBody>
+                    <a:bodyPr/>
+                    <a:lstStyle/>
+                    <a:p>
+                      <a:endParaRPr lang="en-US" dirty="0"/>
+                    </a:p>
+                  </a:txBody>
+                  <a:tcPr/>
+                </a:tc>
+                <a:extLst>
+                  <a:ext uri="{0D108BD9-81ED-4DB2-BD59-A6C34878D82A}">
+                    <a16:rowId xmlns:a16="http://schemas.microsoft.com/office/drawing/2014/main" val="2101415319"/>
+                  </a:ext>
+                </a:extLst>
+              </a:tr>
+              <a:tr h="370840">
+                <a:tc>
+                  <a:txBody>
+                    <a:bodyPr/>
+                    <a:lstStyle/>
+                    <a:p>
+                      <a:r>
+                        <a:rPr lang="en-US" dirty="0"/>
+                        <a:t>DPM</a:t>
+                      </a:r>
+                    </a:p>
+                  </a:txBody>
+                  <a:tcPr/>
+                </a:tc>
+                <a:tc>
+                  <a:txBody>
+                    <a:bodyPr/>
+                    <a:lstStyle/>
+                    <a:p>
+                      <a:endParaRPr lang="en-US" dirty="0"/>
+                    </a:p>
+                  </a:txBody>
+                  <a:tcPr/>
+                </a:tc>
+                <a:tc>
+                  <a:txBody>
+                    <a:bodyPr/>
+                    <a:lstStyle/>
+                    <a:p>
+                      <a:endParaRPr lang="en-US" dirty="0"/>
+                    </a:p>
+                  </a:txBody>
+                  <a:tcPr/>
+                </a:tc>
+                <a:tc>
+                  <a:txBody>
+                    <a:bodyPr/>
+                    <a:lstStyle/>
+                    <a:p>
+                      <a:endParaRPr lang="en-US" dirty="0"/>
+                    </a:p>
+                  </a:txBody>
+                  <a:tcPr/>
+                </a:tc>
+                <a:tc>
+                  <a:txBody>
+                    <a:bodyPr/>
+                    <a:lstStyle/>
+                    <a:p>
+                      <a:endParaRPr lang="en-US" dirty="0"/>
+                    </a:p>
+                  </a:txBody>
+                  <a:tcPr>
+                    <a:solidFill>
+                      <a:schemeClr val="bg2"/>
+                    </a:solidFill>
+                  </a:tcPr>
+                </a:tc>
+                <a:tc>
+                  <a:txBody>
+                    <a:bodyPr/>
+                    <a:lstStyle/>
+                    <a:p>
+                      <a:endParaRPr lang="en-US" dirty="0"/>
+                    </a:p>
+                  </a:txBody>
+                  <a:tcPr/>
+                </a:tc>
+                <a:extLst>
+                  <a:ext uri="{0D108BD9-81ED-4DB2-BD59-A6C34878D82A}">
+                    <a16:rowId xmlns:a16="http://schemas.microsoft.com/office/drawing/2014/main" val="113264312"/>
+                  </a:ext>
+                </a:extLst>
+              </a:tr>
+              <a:tr h="370840">
+                <a:tc>
+                  <a:txBody>
+                    <a:bodyPr/>
+                    <a:lstStyle/>
+                    <a:p>
+                      <a:endParaRPr lang="en-US" dirty="0"/>
+                    </a:p>
+                  </a:txBody>
+                  <a:tcPr/>
+                </a:tc>
+                <a:tc>
+                  <a:txBody>
+                    <a:bodyPr/>
+                    <a:lstStyle/>
+                    <a:p>
+                      <a:endParaRPr lang="en-US"/>
+                    </a:p>
+                  </a:txBody>
+                  <a:tcPr/>
+                </a:tc>
+                <a:tc>
+                  <a:txBody>
+                    <a:bodyPr/>
+                    <a:lstStyle/>
+                    <a:p>
+                      <a:endParaRPr lang="en-US"/>
+                    </a:p>
+                  </a:txBody>
+                  <a:tcPr/>
+                </a:tc>
+                <a:tc>
+                  <a:txBody>
+                    <a:bodyPr/>
+                    <a:lstStyle/>
+                    <a:p>
+                      <a:endParaRPr lang="en-US" dirty="0"/>
+                    </a:p>
+                  </a:txBody>
+                  <a:tcPr/>
+                </a:tc>
+                <a:tc>
+                  <a:txBody>
+                    <a:bodyPr/>
+                    <a:lstStyle/>
+                    <a:p>
+                      <a:endParaRPr lang="en-US" dirty="0"/>
+                    </a:p>
+                  </a:txBody>
+                  <a:tcPr>
+                    <a:solidFill>
+                      <a:schemeClr val="bg2"/>
+                    </a:solidFill>
+                  </a:tcPr>
+                </a:tc>
+                <a:tc>
+                  <a:txBody>
+                    <a:bodyPr/>
+                    <a:lstStyle/>
+                    <a:p>
+                      <a:endParaRPr lang="en-US" dirty="0"/>
+                    </a:p>
+                  </a:txBody>
+                  <a:tcPr/>
+                </a:tc>
+                <a:extLst>
+                  <a:ext uri="{0D108BD9-81ED-4DB2-BD59-A6C34878D82A}">
+                    <a16:rowId xmlns:a16="http://schemas.microsoft.com/office/drawing/2014/main" val="3947779452"/>
+                  </a:ext>
+                </a:extLst>
+              </a:tr>
+              <a:tr h="370840">
+                <a:tc>
+                  <a:txBody>
+                    <a:bodyPr/>
+                    <a:lstStyle/>
+                    <a:p>
+                      <a:r>
+                        <a:rPr lang="en-US" dirty="0"/>
+                        <a:t>RICLPM free</a:t>
+                      </a:r>
+                    </a:p>
+                  </a:txBody>
+                  <a:tcPr/>
+                </a:tc>
+                <a:tc>
+                  <a:txBody>
+                    <a:bodyPr/>
+                    <a:lstStyle/>
+                    <a:p>
+                      <a:endParaRPr lang="en-US" dirty="0"/>
+                    </a:p>
+                  </a:txBody>
+                  <a:tcPr/>
+                </a:tc>
+                <a:tc>
+                  <a:txBody>
+                    <a:bodyPr/>
+                    <a:lstStyle/>
+                    <a:p>
+                      <a:endParaRPr lang="en-US" dirty="0"/>
+                    </a:p>
+                  </a:txBody>
+                  <a:tcPr/>
+                </a:tc>
+                <a:tc>
+                  <a:txBody>
+                    <a:bodyPr/>
+                    <a:lstStyle/>
+                    <a:p>
+                      <a:endParaRPr lang="en-US" dirty="0"/>
+                    </a:p>
+                  </a:txBody>
+                  <a:tcPr/>
+                </a:tc>
+                <a:tc>
+                  <a:txBody>
+                    <a:bodyPr/>
+                    <a:lstStyle/>
+                    <a:p>
+                      <a:endParaRPr lang="en-US" dirty="0"/>
+                    </a:p>
+                  </a:txBody>
+                  <a:tcPr>
+                    <a:solidFill>
+                      <a:schemeClr val="bg2"/>
+                    </a:solidFill>
+                  </a:tcPr>
+                </a:tc>
+                <a:tc>
+                  <a:txBody>
+                    <a:bodyPr/>
+                    <a:lstStyle/>
+                    <a:p>
+                      <a:endParaRPr lang="en-US" dirty="0"/>
+                    </a:p>
+                  </a:txBody>
+                  <a:tcPr/>
+                </a:tc>
+                <a:extLst>
+                  <a:ext uri="{0D108BD9-81ED-4DB2-BD59-A6C34878D82A}">
+                    <a16:rowId xmlns:a16="http://schemas.microsoft.com/office/drawing/2014/main" val="554611558"/>
+                  </a:ext>
+                </a:extLst>
+              </a:tr>
+              <a:tr h="370840">
+                <a:tc>
+                  <a:txBody>
+                    <a:bodyPr/>
+                    <a:lstStyle/>
+                    <a:p>
+                      <a:r>
+                        <a:rPr lang="en-US" dirty="0"/>
+                        <a:t>DPM free</a:t>
+                      </a:r>
+                    </a:p>
+                  </a:txBody>
+                  <a:tcPr/>
+                </a:tc>
+                <a:tc>
+                  <a:txBody>
+                    <a:bodyPr/>
+                    <a:lstStyle/>
+                    <a:p>
+                      <a:endParaRPr lang="en-US" dirty="0"/>
+                    </a:p>
+                  </a:txBody>
+                  <a:tcPr/>
+                </a:tc>
+                <a:tc>
+                  <a:txBody>
+                    <a:bodyPr/>
+                    <a:lstStyle/>
+                    <a:p>
+                      <a:endParaRPr lang="en-US" dirty="0"/>
+                    </a:p>
+                  </a:txBody>
+                  <a:tcPr/>
+                </a:tc>
+                <a:tc>
+                  <a:txBody>
+                    <a:bodyPr/>
+                    <a:lstStyle/>
+                    <a:p>
+                      <a:endParaRPr lang="en-US" dirty="0"/>
+                    </a:p>
+                  </a:txBody>
+                  <a:tcPr/>
+                </a:tc>
+                <a:tc>
+                  <a:txBody>
+                    <a:bodyPr/>
+                    <a:lstStyle/>
+                    <a:p>
+                      <a:endParaRPr lang="en-US" dirty="0"/>
+                    </a:p>
+                  </a:txBody>
+                  <a:tcPr>
+                    <a:solidFill>
+                      <a:schemeClr val="bg2"/>
+                    </a:solidFill>
+                  </a:tcPr>
+                </a:tc>
+                <a:tc>
+                  <a:txBody>
+                    <a:bodyPr/>
+                    <a:lstStyle/>
+                    <a:p>
+                      <a:endParaRPr lang="en-US" dirty="0"/>
+                    </a:p>
+                  </a:txBody>
+                  <a:tcPr/>
+                </a:tc>
+                <a:extLst>
+                  <a:ext uri="{0D108BD9-81ED-4DB2-BD59-A6C34878D82A}">
+                    <a16:rowId xmlns:a16="http://schemas.microsoft.com/office/drawing/2014/main" val="1768701497"/>
+                  </a:ext>
+                </a:extLst>
+              </a:tr>
+            </a:tbl>
+          </a:graphicData>
+        </a:graphic>
+      </p:graphicFrame>
+    </p:spTree>
+    <p:extLst>
+      <p:ext uri="{BB962C8B-B14F-4D97-AF65-F5344CB8AC3E}">
+        <p14:creationId xmlns:p14="http://schemas.microsoft.com/office/powerpoint/2010/main" val="3224745892"/>
+      </p:ext>
+    </p:extLst>
+  </p:cSld>
+  <p:clrMapOvr>
+    <a:masterClrMapping/>
+  </p:clrMapOvr>
+</p:sld>
+</file>
+
+<file path=ppt/slides/slide16.xml><?xml version="1.0" encoding="utf-8"?>
+<p:sld xmlns:a="http://schemas.openxmlformats.org/drawingml/2006/main" xmlns:r="http://schemas.openxmlformats.org/officeDocument/2006/relationships" xmlns:p="http://schemas.openxmlformats.org/presentationml/2006/main">
+  <p:cSld>
+    <p:spTree>
+      <p:nvGrpSpPr>
+        <p:cNvPr id="1" name="">
+          <a:extLst>
+            <a:ext uri="{FF2B5EF4-FFF2-40B4-BE49-F238E27FC236}">
+              <a16:creationId xmlns:a16="http://schemas.microsoft.com/office/drawing/2014/main" id="{CEF92A7B-742A-DA74-6E84-02442FCF8FB5}"/>
+            </a:ext>
+          </a:extLst>
+        </p:cNvPr>
+        <p:cNvGrpSpPr/>
+        <p:nvPr/>
+      </p:nvGrpSpPr>
+      <p:grpSpPr>
+        <a:xfrm>
+          <a:off x="0" y="0"/>
+          <a:ext cx="0" cy="0"/>
+          <a:chOff x="0" y="0"/>
+          <a:chExt cx="0" cy="0"/>
+        </a:xfrm>
+      </p:grpSpPr>
+      <p:sp>
+        <p:nvSpPr>
+          <p:cNvPr id="2" name="Title 1">
+            <a:extLst>
+              <a:ext uri="{FF2B5EF4-FFF2-40B4-BE49-F238E27FC236}">
+                <a16:creationId xmlns:a16="http://schemas.microsoft.com/office/drawing/2014/main" id="{22C755A6-1EB9-C824-9788-F0A5528F4165}"/>
+              </a:ext>
+            </a:extLst>
+          </p:cNvPr>
+          <p:cNvSpPr>
+            <a:spLocks noGrp="1"/>
+          </p:cNvSpPr>
+          <p:nvPr>
+            <p:ph type="title"/>
+          </p:nvPr>
+        </p:nvSpPr>
+        <p:spPr>
+          <a:xfrm>
+            <a:off x="606323" y="354367"/>
+            <a:ext cx="10515600" cy="1325563"/>
+          </a:xfrm>
+        </p:spPr>
+        <p:txBody>
+          <a:bodyPr/>
+          <a:lstStyle/>
+          <a:p>
+            <a:r>
+              <a:rPr lang="en-US" dirty="0"/>
+              <a:t>Sim studies (2)</a:t>
+            </a:r>
+          </a:p>
+        </p:txBody>
+      </p:sp>
+      <p:graphicFrame>
+        <p:nvGraphicFramePr>
+          <p:cNvPr id="4" name="Table 3">
+            <a:extLst>
+              <a:ext uri="{FF2B5EF4-FFF2-40B4-BE49-F238E27FC236}">
+                <a16:creationId xmlns:a16="http://schemas.microsoft.com/office/drawing/2014/main" id="{2DBE8C45-33DA-59DC-E6AA-CEB13742E774}"/>
+              </a:ext>
+            </a:extLst>
+          </p:cNvPr>
+          <p:cNvGraphicFramePr>
+            <a:graphicFrameLocks noGrp="1"/>
+          </p:cNvGraphicFramePr>
+          <p:nvPr>
+            <p:extLst>
+              <p:ext uri="{D42A27DB-BD31-4B8C-83A1-F6EECF244321}">
+                <p14:modId xmlns:p14="http://schemas.microsoft.com/office/powerpoint/2010/main" val="2945758759"/>
+              </p:ext>
+            </p:extLst>
+          </p:nvPr>
+        </p:nvGraphicFramePr>
+        <p:xfrm>
+          <a:off x="606323" y="1390771"/>
+          <a:ext cx="10504129" cy="4445000"/>
+        </p:xfrm>
+        <a:graphic>
+          <a:graphicData uri="http://schemas.openxmlformats.org/drawingml/2006/table">
+            <a:tbl>
+              <a:tblPr firstRow="1" bandRow="1">
+                <a:tableStyleId>{5C22544A-7EE6-4342-B048-85BDC9FD1C3A}</a:tableStyleId>
+              </a:tblPr>
+              <a:tblGrid>
+                <a:gridCol w="1930400">
+                  <a:extLst>
+                    <a:ext uri="{9D8B030D-6E8A-4147-A177-3AD203B41FA5}">
+                      <a16:colId xmlns:a16="http://schemas.microsoft.com/office/drawing/2014/main" val="2001065591"/>
+                    </a:ext>
+                  </a:extLst>
+                </a:gridCol>
+                <a:gridCol w="1779638">
+                  <a:extLst>
+                    <a:ext uri="{9D8B030D-6E8A-4147-A177-3AD203B41FA5}">
+                      <a16:colId xmlns:a16="http://schemas.microsoft.com/office/drawing/2014/main" val="2433874881"/>
+                    </a:ext>
+                  </a:extLst>
+                </a:gridCol>
+                <a:gridCol w="1238865">
+                  <a:extLst>
+                    <a:ext uri="{9D8B030D-6E8A-4147-A177-3AD203B41FA5}">
+                      <a16:colId xmlns:a16="http://schemas.microsoft.com/office/drawing/2014/main" val="3464504445"/>
+                    </a:ext>
+                  </a:extLst>
+                </a:gridCol>
+                <a:gridCol w="1553497">
+                  <a:extLst>
+                    <a:ext uri="{9D8B030D-6E8A-4147-A177-3AD203B41FA5}">
+                      <a16:colId xmlns:a16="http://schemas.microsoft.com/office/drawing/2014/main" val="214330825"/>
+                    </a:ext>
+                  </a:extLst>
+                </a:gridCol>
+                <a:gridCol w="1238864">
+                  <a:extLst>
+                    <a:ext uri="{9D8B030D-6E8A-4147-A177-3AD203B41FA5}">
+                      <a16:colId xmlns:a16="http://schemas.microsoft.com/office/drawing/2014/main" val="3653818921"/>
+                    </a:ext>
+                  </a:extLst>
+                </a:gridCol>
+                <a:gridCol w="2762865">
+                  <a:extLst>
+                    <a:ext uri="{9D8B030D-6E8A-4147-A177-3AD203B41FA5}">
+                      <a16:colId xmlns:a16="http://schemas.microsoft.com/office/drawing/2014/main" val="248906913"/>
+                    </a:ext>
+                  </a:extLst>
+                </a:gridCol>
+              </a:tblGrid>
+              <a:tr h="370840">
+                <a:tc>
+                  <a:txBody>
+                    <a:bodyPr/>
+                    <a:lstStyle/>
+                    <a:p>
+                      <a:r>
+                        <a:rPr lang="en-US" dirty="0"/>
+                        <a:t>Model</a:t>
+                      </a:r>
+                    </a:p>
+                  </a:txBody>
+                  <a:tcPr/>
+                </a:tc>
+                <a:tc>
+                  <a:txBody>
+                    <a:bodyPr/>
+                    <a:lstStyle/>
+                    <a:p>
+                      <a:r>
+                        <a:rPr lang="en-US" dirty="0"/>
+                        <a:t>Delta station. </a:t>
+                      </a:r>
+                    </a:p>
+                  </a:txBody>
+                  <a:tcPr/>
+                </a:tc>
+                <a:tc>
+                  <a:txBody>
+                    <a:bodyPr/>
+                    <a:lstStyle/>
+                    <a:p>
+                      <a:r>
+                        <a:rPr lang="en-US" dirty="0"/>
+                        <a:t>Linearity</a:t>
+                      </a:r>
+                    </a:p>
+                  </a:txBody>
+                  <a:tcPr/>
+                </a:tc>
+                <a:tc>
+                  <a:txBody>
+                    <a:bodyPr/>
+                    <a:lstStyle/>
+                    <a:p>
+                      <a:r>
+                        <a:rPr lang="en-US" dirty="0"/>
+                        <a:t>All observed</a:t>
+                      </a:r>
+                    </a:p>
+                  </a:txBody>
+                  <a:tcPr/>
+                </a:tc>
+                <a:tc>
+                  <a:txBody>
+                    <a:bodyPr/>
+                    <a:lstStyle/>
+                    <a:p>
+                      <a:r>
+                        <a:rPr lang="en-US" dirty="0"/>
+                        <a:t>Normality</a:t>
+                      </a:r>
+                    </a:p>
+                  </a:txBody>
+                  <a:tcPr>
+                    <a:solidFill>
+                      <a:schemeClr val="bg2"/>
+                    </a:solidFill>
+                  </a:tcPr>
+                </a:tc>
+                <a:tc>
+                  <a:txBody>
+                    <a:bodyPr/>
+                    <a:lstStyle/>
+                    <a:p>
+                      <a:r>
+                        <a:rPr lang="en-US" dirty="0"/>
+                        <a:t>Interest</a:t>
+                      </a:r>
+                    </a:p>
+                  </a:txBody>
+                  <a:tcPr/>
+                </a:tc>
+                <a:extLst>
+                  <a:ext uri="{0D108BD9-81ED-4DB2-BD59-A6C34878D82A}">
+                    <a16:rowId xmlns:a16="http://schemas.microsoft.com/office/drawing/2014/main" val="313456875"/>
+                  </a:ext>
+                </a:extLst>
+              </a:tr>
+              <a:tr h="370840">
+                <a:tc>
+                  <a:txBody>
+                    <a:bodyPr/>
+                    <a:lstStyle/>
+                    <a:p>
+                      <a:r>
+                        <a:rPr lang="en-US" dirty="0"/>
+                        <a:t>BCALM RICLPM</a:t>
+                      </a:r>
+                    </a:p>
+                  </a:txBody>
+                  <a:tcPr/>
+                </a:tc>
+                <a:tc>
+                  <a:txBody>
+                    <a:bodyPr/>
+                    <a:lstStyle/>
+                    <a:p>
+                      <a:endParaRPr lang="en-US" dirty="0"/>
+                    </a:p>
+                  </a:txBody>
+                  <a:tcPr/>
+                </a:tc>
+                <a:tc>
+                  <a:txBody>
+                    <a:bodyPr/>
+                    <a:lstStyle/>
+                    <a:p>
+                      <a:endParaRPr lang="en-US" dirty="0"/>
+                    </a:p>
+                  </a:txBody>
+                  <a:tcPr/>
+                </a:tc>
+                <a:tc>
+                  <a:txBody>
+                    <a:bodyPr/>
+                    <a:lstStyle/>
+                    <a:p>
+                      <a:endParaRPr lang="en-US" dirty="0"/>
+                    </a:p>
+                  </a:txBody>
+                  <a:tcPr/>
+                </a:tc>
+                <a:tc>
+                  <a:txBody>
+                    <a:bodyPr/>
+                    <a:lstStyle/>
+                    <a:p>
+                      <a:endParaRPr lang="en-US" dirty="0"/>
+                    </a:p>
+                  </a:txBody>
+                  <a:tcPr>
+                    <a:solidFill>
+                      <a:schemeClr val="bg2"/>
+                    </a:solidFill>
+                  </a:tcPr>
+                </a:tc>
+                <a:tc>
+                  <a:txBody>
+                    <a:bodyPr/>
+                    <a:lstStyle/>
+                    <a:p>
+                      <a:endParaRPr lang="en-US" dirty="0"/>
+                    </a:p>
+                  </a:txBody>
+                  <a:tcPr/>
+                </a:tc>
+                <a:extLst>
+                  <a:ext uri="{0D108BD9-81ED-4DB2-BD59-A6C34878D82A}">
+                    <a16:rowId xmlns:a16="http://schemas.microsoft.com/office/drawing/2014/main" val="928951641"/>
+                  </a:ext>
+                </a:extLst>
+              </a:tr>
+              <a:tr h="370840">
+                <a:tc>
+                  <a:txBody>
+                    <a:bodyPr/>
+                    <a:lstStyle/>
+                    <a:p>
+                      <a:r>
+                        <a:rPr lang="en-US" dirty="0"/>
+                        <a:t>BCAXGB RICLPM</a:t>
+                      </a:r>
+                    </a:p>
+                  </a:txBody>
+                  <a:tcPr/>
+                </a:tc>
+                <a:tc>
+                  <a:txBody>
+                    <a:bodyPr/>
+                    <a:lstStyle/>
+                    <a:p>
+                      <a:endParaRPr lang="en-US"/>
+                    </a:p>
+                  </a:txBody>
+                  <a:tcPr/>
+                </a:tc>
+                <a:tc>
+                  <a:txBody>
+                    <a:bodyPr/>
+                    <a:lstStyle/>
+                    <a:p>
+                      <a:endParaRPr lang="en-US"/>
+                    </a:p>
+                  </a:txBody>
+                  <a:tcPr/>
+                </a:tc>
+                <a:tc>
+                  <a:txBody>
+                    <a:bodyPr/>
+                    <a:lstStyle/>
+                    <a:p>
+                      <a:endParaRPr lang="en-US"/>
+                    </a:p>
+                  </a:txBody>
+                  <a:tcPr/>
+                </a:tc>
+                <a:tc>
+                  <a:txBody>
+                    <a:bodyPr/>
+                    <a:lstStyle/>
+                    <a:p>
+                      <a:endParaRPr lang="en-US"/>
+                    </a:p>
+                  </a:txBody>
+                  <a:tcPr>
+                    <a:solidFill>
+                      <a:schemeClr val="bg2"/>
+                    </a:solidFill>
+                  </a:tcPr>
+                </a:tc>
+                <a:tc>
+                  <a:txBody>
+                    <a:bodyPr/>
+                    <a:lstStyle/>
+                    <a:p>
+                      <a:endParaRPr lang="en-US" dirty="0"/>
+                    </a:p>
+                  </a:txBody>
+                  <a:tcPr/>
+                </a:tc>
+                <a:extLst>
+                  <a:ext uri="{0D108BD9-81ED-4DB2-BD59-A6C34878D82A}">
+                    <a16:rowId xmlns:a16="http://schemas.microsoft.com/office/drawing/2014/main" val="522265642"/>
+                  </a:ext>
+                </a:extLst>
+              </a:tr>
+              <a:tr h="370840">
+                <a:tc>
+                  <a:txBody>
+                    <a:bodyPr/>
+                    <a:lstStyle/>
+                    <a:p>
+                      <a:endParaRPr lang="en-US" dirty="0"/>
+                    </a:p>
+                  </a:txBody>
+                  <a:tcPr/>
+                </a:tc>
+                <a:tc>
+                  <a:txBody>
+                    <a:bodyPr/>
+                    <a:lstStyle/>
+                    <a:p>
+                      <a:endParaRPr lang="en-US"/>
+                    </a:p>
+                  </a:txBody>
+                  <a:tcPr/>
+                </a:tc>
+                <a:tc>
+                  <a:txBody>
+                    <a:bodyPr/>
+                    <a:lstStyle/>
+                    <a:p>
+                      <a:endParaRPr lang="en-US" dirty="0"/>
+                    </a:p>
+                  </a:txBody>
+                  <a:tcPr/>
+                </a:tc>
+                <a:tc>
+                  <a:txBody>
+                    <a:bodyPr/>
+                    <a:lstStyle/>
+                    <a:p>
+                      <a:endParaRPr lang="en-US" dirty="0"/>
+                    </a:p>
+                  </a:txBody>
+                  <a:tcPr/>
+                </a:tc>
+                <a:tc>
+                  <a:txBody>
+                    <a:bodyPr/>
+                    <a:lstStyle/>
+                    <a:p>
+                      <a:endParaRPr lang="en-US" dirty="0"/>
+                    </a:p>
+                  </a:txBody>
+                  <a:tcPr>
+                    <a:solidFill>
+                      <a:schemeClr val="bg2"/>
+                    </a:solidFill>
+                  </a:tcPr>
+                </a:tc>
+                <a:tc>
+                  <a:txBody>
+                    <a:bodyPr/>
+                    <a:lstStyle/>
+                    <a:p>
+                      <a:endParaRPr lang="en-US"/>
+                    </a:p>
+                  </a:txBody>
+                  <a:tcPr/>
+                </a:tc>
+                <a:extLst>
+                  <a:ext uri="{0D108BD9-81ED-4DB2-BD59-A6C34878D82A}">
+                    <a16:rowId xmlns:a16="http://schemas.microsoft.com/office/drawing/2014/main" val="932761022"/>
+                  </a:ext>
+                </a:extLst>
+              </a:tr>
+              <a:tr h="341017">
+                <a:tc>
+                  <a:txBody>
+                    <a:bodyPr/>
+                    <a:lstStyle/>
+                    <a:p>
+                      <a:r>
+                        <a:rPr lang="en-US" dirty="0"/>
+                        <a:t>BCALM DPM</a:t>
+                      </a:r>
+                    </a:p>
+                  </a:txBody>
+                  <a:tcPr/>
+                </a:tc>
+                <a:tc>
+                  <a:txBody>
+                    <a:bodyPr/>
+                    <a:lstStyle/>
+                    <a:p>
+                      <a:endParaRPr lang="en-US" dirty="0"/>
+                    </a:p>
+                  </a:txBody>
+                  <a:tcPr/>
+                </a:tc>
+                <a:tc>
+                  <a:txBody>
+                    <a:bodyPr/>
+                    <a:lstStyle/>
+                    <a:p>
+                      <a:endParaRPr lang="en-US" dirty="0"/>
+                    </a:p>
+                  </a:txBody>
+                  <a:tcPr/>
+                </a:tc>
+                <a:tc>
+                  <a:txBody>
+                    <a:bodyPr/>
+                    <a:lstStyle/>
+                    <a:p>
+                      <a:endParaRPr lang="en-US" dirty="0"/>
+                    </a:p>
+                  </a:txBody>
+                  <a:tcPr/>
+                </a:tc>
+                <a:tc>
+                  <a:txBody>
+                    <a:bodyPr/>
+                    <a:lstStyle/>
+                    <a:p>
+                      <a:endParaRPr lang="en-US" dirty="0"/>
+                    </a:p>
+                  </a:txBody>
+                  <a:tcPr>
+                    <a:solidFill>
+                      <a:schemeClr val="bg2"/>
+                    </a:solidFill>
+                  </a:tcPr>
+                </a:tc>
+                <a:tc>
+                  <a:txBody>
+                    <a:bodyPr/>
+                    <a:lstStyle/>
+                    <a:p>
+                      <a:endParaRPr lang="en-US" dirty="0"/>
+                    </a:p>
+                  </a:txBody>
+                  <a:tcPr/>
+                </a:tc>
+                <a:extLst>
+                  <a:ext uri="{0D108BD9-81ED-4DB2-BD59-A6C34878D82A}">
+                    <a16:rowId xmlns:a16="http://schemas.microsoft.com/office/drawing/2014/main" val="2421879190"/>
+                  </a:ext>
+                </a:extLst>
+              </a:tr>
+              <a:tr h="370840">
+                <a:tc>
+                  <a:txBody>
+                    <a:bodyPr/>
+                    <a:lstStyle/>
+                    <a:p>
+                      <a:r>
+                        <a:rPr lang="en-US" dirty="0"/>
+                        <a:t>BCAXGB DPM</a:t>
+                      </a:r>
+                    </a:p>
+                  </a:txBody>
+                  <a:tcPr/>
+                </a:tc>
+                <a:tc>
+                  <a:txBody>
+                    <a:bodyPr/>
+                    <a:lstStyle/>
+                    <a:p>
+                      <a:endParaRPr lang="en-US" dirty="0"/>
+                    </a:p>
+                  </a:txBody>
+                  <a:tcPr/>
+                </a:tc>
+                <a:tc>
+                  <a:txBody>
+                    <a:bodyPr/>
+                    <a:lstStyle/>
+                    <a:p>
+                      <a:endParaRPr lang="en-US" dirty="0"/>
+                    </a:p>
+                  </a:txBody>
+                  <a:tcPr/>
+                </a:tc>
+                <a:tc>
+                  <a:txBody>
+                    <a:bodyPr/>
+                    <a:lstStyle/>
+                    <a:p>
+                      <a:endParaRPr lang="en-US" dirty="0"/>
+                    </a:p>
+                  </a:txBody>
+                  <a:tcPr/>
+                </a:tc>
+                <a:tc>
+                  <a:txBody>
+                    <a:bodyPr/>
+                    <a:lstStyle/>
+                    <a:p>
+                      <a:endParaRPr lang="en-US" dirty="0"/>
+                    </a:p>
+                  </a:txBody>
+                  <a:tcPr>
+                    <a:solidFill>
+                      <a:schemeClr val="bg2"/>
+                    </a:solidFill>
+                  </a:tcPr>
+                </a:tc>
+                <a:tc>
+                  <a:txBody>
+                    <a:bodyPr/>
+                    <a:lstStyle/>
+                    <a:p>
+                      <a:endParaRPr lang="en-US" dirty="0"/>
+                    </a:p>
+                  </a:txBody>
+                  <a:tcPr/>
+                </a:tc>
+                <a:extLst>
+                  <a:ext uri="{0D108BD9-81ED-4DB2-BD59-A6C34878D82A}">
+                    <a16:rowId xmlns:a16="http://schemas.microsoft.com/office/drawing/2014/main" val="2148181721"/>
+                  </a:ext>
+                </a:extLst>
+              </a:tr>
+              <a:tr h="370840">
+                <a:tc>
+                  <a:txBody>
+                    <a:bodyPr/>
+                    <a:lstStyle/>
+                    <a:p>
+                      <a:endParaRPr lang="en-US" dirty="0"/>
+                    </a:p>
+                  </a:txBody>
+                  <a:tcPr/>
+                </a:tc>
+                <a:tc>
+                  <a:txBody>
+                    <a:bodyPr/>
+                    <a:lstStyle/>
+                    <a:p>
+                      <a:endParaRPr lang="en-US"/>
+                    </a:p>
+                  </a:txBody>
+                  <a:tcPr/>
+                </a:tc>
+                <a:tc>
+                  <a:txBody>
+                    <a:bodyPr/>
+                    <a:lstStyle/>
+                    <a:p>
+                      <a:endParaRPr lang="en-US"/>
+                    </a:p>
+                  </a:txBody>
+                  <a:tcPr/>
+                </a:tc>
+                <a:tc>
+                  <a:txBody>
+                    <a:bodyPr/>
+                    <a:lstStyle/>
+                    <a:p>
+                      <a:endParaRPr lang="en-US" dirty="0"/>
+                    </a:p>
+                  </a:txBody>
+                  <a:tcPr/>
+                </a:tc>
+                <a:tc>
+                  <a:txBody>
+                    <a:bodyPr/>
+                    <a:lstStyle/>
+                    <a:p>
+                      <a:endParaRPr lang="en-US"/>
+                    </a:p>
+                  </a:txBody>
+                  <a:tcPr>
+                    <a:solidFill>
+                      <a:schemeClr val="bg2"/>
+                    </a:solidFill>
+                  </a:tcPr>
+                </a:tc>
+                <a:tc>
+                  <a:txBody>
+                    <a:bodyPr/>
+                    <a:lstStyle/>
+                    <a:p>
+                      <a:endParaRPr lang="en-US"/>
+                    </a:p>
+                  </a:txBody>
+                  <a:tcPr/>
+                </a:tc>
+                <a:extLst>
+                  <a:ext uri="{0D108BD9-81ED-4DB2-BD59-A6C34878D82A}">
+                    <a16:rowId xmlns:a16="http://schemas.microsoft.com/office/drawing/2014/main" val="1673032704"/>
+                  </a:ext>
+                </a:extLst>
+              </a:tr>
+              <a:tr h="370840">
+                <a:tc>
+                  <a:txBody>
+                    <a:bodyPr/>
+                    <a:lstStyle/>
+                    <a:p>
+                      <a:r>
+                        <a:rPr lang="en-US" dirty="0"/>
+                        <a:t>?</a:t>
+                      </a:r>
+                    </a:p>
+                  </a:txBody>
+                  <a:tcPr/>
+                </a:tc>
+                <a:tc>
+                  <a:txBody>
+                    <a:bodyPr/>
+                    <a:lstStyle/>
+                    <a:p>
+                      <a:endParaRPr lang="en-US" dirty="0"/>
+                    </a:p>
+                  </a:txBody>
+                  <a:tcPr/>
+                </a:tc>
+                <a:tc>
+                  <a:txBody>
+                    <a:bodyPr/>
+                    <a:lstStyle/>
+                    <a:p>
+                      <a:endParaRPr lang="en-US" dirty="0"/>
+                    </a:p>
+                  </a:txBody>
+                  <a:tcPr/>
+                </a:tc>
+                <a:tc>
+                  <a:txBody>
+                    <a:bodyPr/>
+                    <a:lstStyle/>
+                    <a:p>
+                      <a:endParaRPr lang="en-US" dirty="0"/>
+                    </a:p>
+                  </a:txBody>
+                  <a:tcPr/>
+                </a:tc>
+                <a:tc>
+                  <a:txBody>
+                    <a:bodyPr/>
+                    <a:lstStyle/>
+                    <a:p>
+                      <a:endParaRPr lang="en-US" dirty="0"/>
+                    </a:p>
+                  </a:txBody>
+                  <a:tcPr>
+                    <a:solidFill>
+                      <a:schemeClr val="bg2"/>
+                    </a:solidFill>
+                  </a:tcPr>
+                </a:tc>
+                <a:tc>
+                  <a:txBody>
+                    <a:bodyPr/>
+                    <a:lstStyle/>
+                    <a:p>
+                      <a:endParaRPr lang="en-US" dirty="0"/>
+                    </a:p>
+                  </a:txBody>
+                  <a:tcPr/>
+                </a:tc>
+                <a:extLst>
+                  <a:ext uri="{0D108BD9-81ED-4DB2-BD59-A6C34878D82A}">
+                    <a16:rowId xmlns:a16="http://schemas.microsoft.com/office/drawing/2014/main" val="2101415319"/>
+                  </a:ext>
+                </a:extLst>
+              </a:tr>
+              <a:tr h="370840">
+                <a:tc>
+                  <a:txBody>
+                    <a:bodyPr/>
+                    <a:lstStyle/>
+                    <a:p>
+                      <a:endParaRPr lang="en-US" dirty="0"/>
+                    </a:p>
+                  </a:txBody>
+                  <a:tcPr/>
+                </a:tc>
+                <a:tc>
+                  <a:txBody>
+                    <a:bodyPr/>
+                    <a:lstStyle/>
+                    <a:p>
+                      <a:endParaRPr lang="en-US" dirty="0"/>
+                    </a:p>
+                  </a:txBody>
+                  <a:tcPr/>
+                </a:tc>
+                <a:tc>
+                  <a:txBody>
+                    <a:bodyPr/>
+                    <a:lstStyle/>
+                    <a:p>
+                      <a:endParaRPr lang="en-US" dirty="0"/>
+                    </a:p>
+                  </a:txBody>
+                  <a:tcPr/>
+                </a:tc>
+                <a:tc>
+                  <a:txBody>
+                    <a:bodyPr/>
+                    <a:lstStyle/>
+                    <a:p>
+                      <a:endParaRPr lang="en-US" dirty="0"/>
+                    </a:p>
+                  </a:txBody>
+                  <a:tcPr/>
+                </a:tc>
+                <a:tc>
+                  <a:txBody>
+                    <a:bodyPr/>
+                    <a:lstStyle/>
+                    <a:p>
+                      <a:endParaRPr lang="en-US" dirty="0"/>
+                    </a:p>
+                  </a:txBody>
+                  <a:tcPr>
+                    <a:solidFill>
+                      <a:schemeClr val="bg2"/>
+                    </a:solidFill>
+                  </a:tcPr>
+                </a:tc>
+                <a:tc>
+                  <a:txBody>
+                    <a:bodyPr/>
+                    <a:lstStyle/>
+                    <a:p>
+                      <a:endParaRPr lang="en-US" dirty="0"/>
+                    </a:p>
+                  </a:txBody>
+                  <a:tcPr/>
+                </a:tc>
+                <a:extLst>
+                  <a:ext uri="{0D108BD9-81ED-4DB2-BD59-A6C34878D82A}">
+                    <a16:rowId xmlns:a16="http://schemas.microsoft.com/office/drawing/2014/main" val="113264312"/>
+                  </a:ext>
+                </a:extLst>
+              </a:tr>
+              <a:tr h="370840">
+                <a:tc>
+                  <a:txBody>
+                    <a:bodyPr/>
+                    <a:lstStyle/>
+                    <a:p>
+                      <a:endParaRPr lang="en-US" dirty="0"/>
+                    </a:p>
+                  </a:txBody>
+                  <a:tcPr/>
+                </a:tc>
+                <a:tc>
+                  <a:txBody>
+                    <a:bodyPr/>
+                    <a:lstStyle/>
+                    <a:p>
+                      <a:endParaRPr lang="en-US"/>
+                    </a:p>
+                  </a:txBody>
+                  <a:tcPr/>
+                </a:tc>
+                <a:tc>
+                  <a:txBody>
+                    <a:bodyPr/>
+                    <a:lstStyle/>
+                    <a:p>
+                      <a:endParaRPr lang="en-US"/>
+                    </a:p>
+                  </a:txBody>
+                  <a:tcPr/>
+                </a:tc>
+                <a:tc>
+                  <a:txBody>
+                    <a:bodyPr/>
+                    <a:lstStyle/>
+                    <a:p>
+                      <a:endParaRPr lang="en-US" dirty="0"/>
+                    </a:p>
+                  </a:txBody>
+                  <a:tcPr/>
+                </a:tc>
+                <a:tc>
+                  <a:txBody>
+                    <a:bodyPr/>
+                    <a:lstStyle/>
+                    <a:p>
+                      <a:endParaRPr lang="en-US" dirty="0"/>
+                    </a:p>
+                  </a:txBody>
+                  <a:tcPr>
+                    <a:solidFill>
+                      <a:schemeClr val="bg2"/>
+                    </a:solidFill>
+                  </a:tcPr>
+                </a:tc>
+                <a:tc>
+                  <a:txBody>
+                    <a:bodyPr/>
+                    <a:lstStyle/>
+                    <a:p>
+                      <a:endParaRPr lang="en-US" dirty="0"/>
+                    </a:p>
+                  </a:txBody>
+                  <a:tcPr/>
+                </a:tc>
+                <a:extLst>
+                  <a:ext uri="{0D108BD9-81ED-4DB2-BD59-A6C34878D82A}">
+                    <a16:rowId xmlns:a16="http://schemas.microsoft.com/office/drawing/2014/main" val="3947779452"/>
+                  </a:ext>
+                </a:extLst>
+              </a:tr>
+              <a:tr h="370840">
+                <a:tc>
+                  <a:txBody>
+                    <a:bodyPr/>
+                    <a:lstStyle/>
+                    <a:p>
+                      <a:endParaRPr lang="en-US" dirty="0"/>
+                    </a:p>
+                  </a:txBody>
+                  <a:tcPr/>
+                </a:tc>
+                <a:tc>
+                  <a:txBody>
+                    <a:bodyPr/>
+                    <a:lstStyle/>
+                    <a:p>
+                      <a:endParaRPr lang="en-US" dirty="0"/>
+                    </a:p>
+                  </a:txBody>
+                  <a:tcPr/>
+                </a:tc>
+                <a:tc>
+                  <a:txBody>
+                    <a:bodyPr/>
+                    <a:lstStyle/>
+                    <a:p>
+                      <a:endParaRPr lang="en-US" dirty="0"/>
+                    </a:p>
+                  </a:txBody>
+                  <a:tcPr/>
+                </a:tc>
+                <a:tc>
+                  <a:txBody>
+                    <a:bodyPr/>
+                    <a:lstStyle/>
+                    <a:p>
+                      <a:endParaRPr lang="en-US" dirty="0"/>
+                    </a:p>
+                  </a:txBody>
+                  <a:tcPr/>
+                </a:tc>
+                <a:tc>
+                  <a:txBody>
+                    <a:bodyPr/>
+                    <a:lstStyle/>
+                    <a:p>
+                      <a:endParaRPr lang="en-US" dirty="0"/>
+                    </a:p>
+                  </a:txBody>
+                  <a:tcPr>
+                    <a:solidFill>
+                      <a:schemeClr val="bg2"/>
+                    </a:solidFill>
+                  </a:tcPr>
+                </a:tc>
+                <a:tc>
+                  <a:txBody>
+                    <a:bodyPr/>
+                    <a:lstStyle/>
+                    <a:p>
+                      <a:endParaRPr lang="en-US" dirty="0"/>
+                    </a:p>
+                  </a:txBody>
+                  <a:tcPr/>
+                </a:tc>
+                <a:extLst>
+                  <a:ext uri="{0D108BD9-81ED-4DB2-BD59-A6C34878D82A}">
+                    <a16:rowId xmlns:a16="http://schemas.microsoft.com/office/drawing/2014/main" val="554611558"/>
+                  </a:ext>
+                </a:extLst>
+              </a:tr>
+              <a:tr h="370840">
+                <a:tc>
+                  <a:txBody>
+                    <a:bodyPr/>
+                    <a:lstStyle/>
+                    <a:p>
+                      <a:endParaRPr lang="en-US" dirty="0"/>
+                    </a:p>
+                  </a:txBody>
+                  <a:tcPr/>
+                </a:tc>
+                <a:tc>
+                  <a:txBody>
+                    <a:bodyPr/>
+                    <a:lstStyle/>
+                    <a:p>
+                      <a:endParaRPr lang="en-US" dirty="0"/>
+                    </a:p>
+                  </a:txBody>
+                  <a:tcPr/>
+                </a:tc>
+                <a:tc>
+                  <a:txBody>
+                    <a:bodyPr/>
+                    <a:lstStyle/>
+                    <a:p>
+                      <a:endParaRPr lang="en-US" dirty="0"/>
+                    </a:p>
+                  </a:txBody>
+                  <a:tcPr/>
+                </a:tc>
+                <a:tc>
+                  <a:txBody>
+                    <a:bodyPr/>
+                    <a:lstStyle/>
+                    <a:p>
+                      <a:endParaRPr lang="en-US" dirty="0"/>
+                    </a:p>
+                  </a:txBody>
+                  <a:tcPr/>
+                </a:tc>
+                <a:tc>
+                  <a:txBody>
+                    <a:bodyPr/>
+                    <a:lstStyle/>
+                    <a:p>
+                      <a:endParaRPr lang="en-US" dirty="0"/>
+                    </a:p>
+                  </a:txBody>
+                  <a:tcPr>
+                    <a:solidFill>
+                      <a:schemeClr val="bg2"/>
+                    </a:solidFill>
+                  </a:tcPr>
+                </a:tc>
+                <a:tc>
+                  <a:txBody>
+                    <a:bodyPr/>
+                    <a:lstStyle/>
+                    <a:p>
+                      <a:endParaRPr lang="en-US" dirty="0"/>
+                    </a:p>
+                  </a:txBody>
+                  <a:tcPr/>
+                </a:tc>
+                <a:extLst>
+                  <a:ext uri="{0D108BD9-81ED-4DB2-BD59-A6C34878D82A}">
+                    <a16:rowId xmlns:a16="http://schemas.microsoft.com/office/drawing/2014/main" val="1768701497"/>
+                  </a:ext>
+                </a:extLst>
+              </a:tr>
+            </a:tbl>
+          </a:graphicData>
+        </a:graphic>
+      </p:graphicFrame>
+    </p:spTree>
+    <p:extLst>
+      <p:ext uri="{BB962C8B-B14F-4D97-AF65-F5344CB8AC3E}">
+        <p14:creationId xmlns:p14="http://schemas.microsoft.com/office/powerpoint/2010/main" val="3286005289"/>
+      </p:ext>
+    </p:extLst>
+  </p:cSld>
+  <p:clrMapOvr>
+    <a:masterClrMapping/>
+  </p:clrMapOvr>
+</p:sld>
+</file>
+
 <file path=ppt/slides/slide2.xml><?xml version="1.0" encoding="utf-8"?>
 <p:sld xmlns:a="http://schemas.openxmlformats.org/drawingml/2006/main" xmlns:r="http://schemas.openxmlformats.org/officeDocument/2006/relationships" xmlns:p="http://schemas.openxmlformats.org/presentationml/2006/main">
   <p:cSld>
@@ -3919,7 +6518,7 @@
             <p:ph idx="1"/>
             <p:extLst>
               <p:ext uri="{D42A27DB-BD31-4B8C-83A1-F6EECF244321}">
-                <p14:modId xmlns:p14="http://schemas.microsoft.com/office/powerpoint/2010/main" val="569086373"/>
+                <p14:modId xmlns:p14="http://schemas.microsoft.com/office/powerpoint/2010/main" val="651731708"/>
               </p:ext>
             </p:extLst>
           </p:nvPr>
@@ -4106,7 +6705,7 @@
                     <a:p>
                       <a:r>
                         <a:rPr lang="en-US" dirty="0"/>
-                        <a:t>Well…</a:t>
+                        <a:t>Vink et al (in prep)</a:t>
                       </a:r>
                     </a:p>
                   </a:txBody>
@@ -4337,6 +6936,94 @@
       </p:grpSpPr>
       <p:sp>
         <p:nvSpPr>
+          <p:cNvPr id="2" name="Title 1">
+            <a:extLst>
+              <a:ext uri="{FF2B5EF4-FFF2-40B4-BE49-F238E27FC236}">
+                <a16:creationId xmlns:a16="http://schemas.microsoft.com/office/drawing/2014/main" id="{A7A129C9-5359-CC5D-4726-B5883E344387}"/>
+              </a:ext>
+            </a:extLst>
+          </p:cNvPr>
+          <p:cNvSpPr>
+            <a:spLocks noGrp="1"/>
+          </p:cNvSpPr>
+          <p:nvPr>
+            <p:ph type="title"/>
+          </p:nvPr>
+        </p:nvSpPr>
+        <p:spPr/>
+        <p:txBody>
+          <a:bodyPr/>
+          <a:lstStyle/>
+          <a:p>
+            <a:r>
+              <a:rPr lang="en-US" dirty="0"/>
+              <a:t>Combining approaches</a:t>
+            </a:r>
+          </a:p>
+        </p:txBody>
+      </p:sp>
+      <p:pic>
+        <p:nvPicPr>
+          <p:cNvPr id="5" name="Picture 4">
+            <a:extLst>
+              <a:ext uri="{FF2B5EF4-FFF2-40B4-BE49-F238E27FC236}">
+                <a16:creationId xmlns:a16="http://schemas.microsoft.com/office/drawing/2014/main" id="{63463F72-E15D-B204-5BE7-C2F92FB45718}"/>
+              </a:ext>
+            </a:extLst>
+          </p:cNvPr>
+          <p:cNvPicPr>
+            <a:picLocks noChangeAspect="1"/>
+          </p:cNvPicPr>
+          <p:nvPr/>
+        </p:nvPicPr>
+        <p:blipFill>
+          <a:blip r:embed="rId2"/>
+          <a:stretch>
+            <a:fillRect/>
+          </a:stretch>
+        </p:blipFill>
+        <p:spPr>
+          <a:xfrm>
+            <a:off x="622471" y="1554105"/>
+            <a:ext cx="8987874" cy="4077047"/>
+          </a:xfrm>
+          <a:prstGeom prst="rect">
+            <a:avLst/>
+          </a:prstGeom>
+        </p:spPr>
+      </p:pic>
+    </p:spTree>
+    <p:extLst>
+      <p:ext uri="{BB962C8B-B14F-4D97-AF65-F5344CB8AC3E}">
+        <p14:creationId xmlns:p14="http://schemas.microsoft.com/office/powerpoint/2010/main" val="1186340916"/>
+      </p:ext>
+    </p:extLst>
+  </p:cSld>
+  <p:clrMapOvr>
+    <a:masterClrMapping/>
+  </p:clrMapOvr>
+</p:sld>
+</file>
+
+<file path=ppt/slides/slide7.xml><?xml version="1.0" encoding="utf-8"?>
+<p:sld xmlns:a="http://schemas.openxmlformats.org/drawingml/2006/main" xmlns:r="http://schemas.openxmlformats.org/officeDocument/2006/relationships" xmlns:p="http://schemas.openxmlformats.org/presentationml/2006/main">
+  <p:cSld>
+    <p:spTree>
+      <p:nvGrpSpPr>
+        <p:cNvPr id="1" name=""/>
+        <p:cNvGrpSpPr/>
+        <p:nvPr/>
+      </p:nvGrpSpPr>
+      <p:grpSpPr>
+        <a:xfrm>
+          <a:off x="0" y="0"/>
+          <a:ext cx="0" cy="0"/>
+          <a:chOff x="0" y="0"/>
+          <a:chExt cx="0" cy="0"/>
+        </a:xfrm>
+      </p:grpSpPr>
+      <p:sp>
+        <p:nvSpPr>
           <p:cNvPr id="4" name="Rectangle 3">
             <a:extLst>
               <a:ext uri="{FF2B5EF4-FFF2-40B4-BE49-F238E27FC236}">
@@ -5037,6 +7724,264 @@
     <p:extLst>
       <p:ext uri="{BB962C8B-B14F-4D97-AF65-F5344CB8AC3E}">
         <p14:creationId xmlns:p14="http://schemas.microsoft.com/office/powerpoint/2010/main" val="2620471351"/>
+      </p:ext>
+    </p:extLst>
+  </p:cSld>
+  <p:clrMapOvr>
+    <a:masterClrMapping/>
+  </p:clrMapOvr>
+</p:sld>
+</file>
+
+<file path=ppt/slides/slide8.xml><?xml version="1.0" encoding="utf-8"?>
+<p:sld xmlns:a="http://schemas.openxmlformats.org/drawingml/2006/main" xmlns:r="http://schemas.openxmlformats.org/officeDocument/2006/relationships" xmlns:p="http://schemas.openxmlformats.org/presentationml/2006/main">
+  <p:cSld>
+    <p:spTree>
+      <p:nvGrpSpPr>
+        <p:cNvPr id="1" name=""/>
+        <p:cNvGrpSpPr/>
+        <p:nvPr/>
+      </p:nvGrpSpPr>
+      <p:grpSpPr>
+        <a:xfrm>
+          <a:off x="0" y="0"/>
+          <a:ext cx="0" cy="0"/>
+          <a:chOff x="0" y="0"/>
+          <a:chExt cx="0" cy="0"/>
+        </a:xfrm>
+      </p:grpSpPr>
+      <p:sp>
+        <p:nvSpPr>
+          <p:cNvPr id="2" name="Title 1">
+            <a:extLst>
+              <a:ext uri="{FF2B5EF4-FFF2-40B4-BE49-F238E27FC236}">
+                <a16:creationId xmlns:a16="http://schemas.microsoft.com/office/drawing/2014/main" id="{1DCA2811-A05C-D6CA-6A64-E25297DAD80E}"/>
+              </a:ext>
+            </a:extLst>
+          </p:cNvPr>
+          <p:cNvSpPr>
+            <a:spLocks noGrp="1"/>
+          </p:cNvSpPr>
+          <p:nvPr>
+            <p:ph type="title"/>
+          </p:nvPr>
+        </p:nvSpPr>
+        <p:spPr/>
+        <p:txBody>
+          <a:bodyPr/>
+          <a:lstStyle/>
+          <a:p>
+            <a:r>
+              <a:rPr lang="en-US" dirty="0"/>
+              <a:t>Data generation</a:t>
+            </a:r>
+          </a:p>
+        </p:txBody>
+      </p:sp>
+      <p:pic>
+        <p:nvPicPr>
+          <p:cNvPr id="5" name="Content Placeholder 4">
+            <a:extLst>
+              <a:ext uri="{FF2B5EF4-FFF2-40B4-BE49-F238E27FC236}">
+                <a16:creationId xmlns:a16="http://schemas.microsoft.com/office/drawing/2014/main" id="{5D26DED3-7052-F19C-3766-77DE1928EEA8}"/>
+              </a:ext>
+            </a:extLst>
+          </p:cNvPr>
+          <p:cNvPicPr>
+            <a:picLocks noGrp="1" noChangeAspect="1"/>
+          </p:cNvPicPr>
+          <p:nvPr>
+            <p:ph idx="1"/>
+          </p:nvPr>
+        </p:nvPicPr>
+        <p:blipFill>
+          <a:blip r:embed="rId2"/>
+          <a:stretch>
+            <a:fillRect/>
+          </a:stretch>
+        </p:blipFill>
+        <p:spPr>
+          <a:xfrm rot="16200000">
+            <a:off x="1304982" y="981513"/>
+            <a:ext cx="5123237" cy="5899486"/>
+          </a:xfrm>
+          <a:prstGeom prst="rect">
+            <a:avLst/>
+          </a:prstGeom>
+        </p:spPr>
+      </p:pic>
+      <p:sp>
+        <p:nvSpPr>
+          <p:cNvPr id="3" name="TextBox 2">
+            <a:extLst>
+              <a:ext uri="{FF2B5EF4-FFF2-40B4-BE49-F238E27FC236}">
+                <a16:creationId xmlns:a16="http://schemas.microsoft.com/office/drawing/2014/main" id="{EE6C939E-C713-DE8D-6F3C-9678B03B8049}"/>
+              </a:ext>
+            </a:extLst>
+          </p:cNvPr>
+          <p:cNvSpPr txBox="1"/>
+          <p:nvPr/>
+        </p:nvSpPr>
+        <p:spPr>
+          <a:xfrm>
+            <a:off x="7708490" y="1690688"/>
+            <a:ext cx="2841523" cy="1754326"/>
+          </a:xfrm>
+          <a:prstGeom prst="rect">
+            <a:avLst/>
+          </a:prstGeom>
+          <a:noFill/>
+        </p:spPr>
+        <p:txBody>
+          <a:bodyPr wrap="square" rtlCol="0">
+            <a:spAutoFit/>
+          </a:bodyPr>
+          <a:lstStyle/>
+          <a:p>
+            <a:pPr marL="285750" indent="-285750">
+              <a:buFont typeface="Arial" panose="020B0604020202020204" pitchFamily="34" charset="0"/>
+              <a:buChar char="•"/>
+            </a:pPr>
+            <a:r>
+              <a:rPr lang="en-US" dirty="0"/>
+              <a:t>Var(X) = Var(Y) = 1</a:t>
+            </a:r>
+          </a:p>
+          <a:p>
+            <a:pPr marL="285750" indent="-285750">
+              <a:buFont typeface="Arial" panose="020B0604020202020204" pitchFamily="34" charset="0"/>
+              <a:buChar char="•"/>
+            </a:pPr>
+            <a:endParaRPr lang="en-US" dirty="0"/>
+          </a:p>
+          <a:p>
+            <a:pPr marL="285750" indent="-285750">
+              <a:buFont typeface="Arial" panose="020B0604020202020204" pitchFamily="34" charset="0"/>
+              <a:buChar char="•"/>
+            </a:pPr>
+            <a:r>
+              <a:rPr lang="en-US" dirty="0"/>
+              <a:t>Omega looks like that only in the case that:</a:t>
+            </a:r>
+          </a:p>
+          <a:p>
+            <a:pPr marL="285750" indent="-285750">
+              <a:buFont typeface="Arial" panose="020B0604020202020204" pitchFamily="34" charset="0"/>
+              <a:buChar char="•"/>
+            </a:pPr>
+            <a:r>
+              <a:rPr lang="en-US"/>
+              <a:t>C ~ N(0,1)</a:t>
+            </a:r>
+            <a:endParaRPr lang="en-US" dirty="0"/>
+          </a:p>
+          <a:p>
+            <a:pPr marL="285750" indent="-285750">
+              <a:buFont typeface="Arial" panose="020B0604020202020204" pitchFamily="34" charset="0"/>
+              <a:buChar char="•"/>
+            </a:pPr>
+            <a:endParaRPr lang="en-US" dirty="0"/>
+          </a:p>
+        </p:txBody>
+      </p:sp>
+    </p:spTree>
+    <p:extLst>
+      <p:ext uri="{BB962C8B-B14F-4D97-AF65-F5344CB8AC3E}">
+        <p14:creationId xmlns:p14="http://schemas.microsoft.com/office/powerpoint/2010/main" val="2168465577"/>
+      </p:ext>
+    </p:extLst>
+  </p:cSld>
+  <p:clrMapOvr>
+    <a:masterClrMapping/>
+  </p:clrMapOvr>
+</p:sld>
+</file>
+
+<file path=ppt/slides/slide9.xml><?xml version="1.0" encoding="utf-8"?>
+<p:sld xmlns:a="http://schemas.openxmlformats.org/drawingml/2006/main" xmlns:r="http://schemas.openxmlformats.org/officeDocument/2006/relationships" xmlns:p="http://schemas.openxmlformats.org/presentationml/2006/main">
+  <p:cSld>
+    <p:spTree>
+      <p:nvGrpSpPr>
+        <p:cNvPr id="1" name="">
+          <a:extLst>
+            <a:ext uri="{FF2B5EF4-FFF2-40B4-BE49-F238E27FC236}">
+              <a16:creationId xmlns:a16="http://schemas.microsoft.com/office/drawing/2014/main" id="{73D4B46C-B6BB-8DF6-1999-8D748ED71735}"/>
+            </a:ext>
+          </a:extLst>
+        </p:cNvPr>
+        <p:cNvGrpSpPr/>
+        <p:nvPr/>
+      </p:nvGrpSpPr>
+      <p:grpSpPr>
+        <a:xfrm>
+          <a:off x="0" y="0"/>
+          <a:ext cx="0" cy="0"/>
+          <a:chOff x="0" y="0"/>
+          <a:chExt cx="0" cy="0"/>
+        </a:xfrm>
+      </p:grpSpPr>
+      <p:sp>
+        <p:nvSpPr>
+          <p:cNvPr id="2" name="Title 1">
+            <a:extLst>
+              <a:ext uri="{FF2B5EF4-FFF2-40B4-BE49-F238E27FC236}">
+                <a16:creationId xmlns:a16="http://schemas.microsoft.com/office/drawing/2014/main" id="{FE13F87D-ACE3-210C-C88B-B7E916CC5CEB}"/>
+              </a:ext>
+            </a:extLst>
+          </p:cNvPr>
+          <p:cNvSpPr>
+            <a:spLocks noGrp="1"/>
+          </p:cNvSpPr>
+          <p:nvPr>
+            <p:ph type="title"/>
+          </p:nvPr>
+        </p:nvSpPr>
+        <p:spPr/>
+        <p:txBody>
+          <a:bodyPr/>
+          <a:lstStyle/>
+          <a:p>
+            <a:r>
+              <a:rPr lang="en-US" dirty="0"/>
+              <a:t>Data generation</a:t>
+            </a:r>
+          </a:p>
+        </p:txBody>
+      </p:sp>
+      <p:pic>
+        <p:nvPicPr>
+          <p:cNvPr id="12" name="Picture 11">
+            <a:extLst>
+              <a:ext uri="{FF2B5EF4-FFF2-40B4-BE49-F238E27FC236}">
+                <a16:creationId xmlns:a16="http://schemas.microsoft.com/office/drawing/2014/main" id="{48524875-4ED7-9ED1-3C2C-E4E54DEC2474}"/>
+              </a:ext>
+            </a:extLst>
+          </p:cNvPr>
+          <p:cNvPicPr>
+            <a:picLocks noChangeAspect="1"/>
+          </p:cNvPicPr>
+          <p:nvPr/>
+        </p:nvPicPr>
+        <p:blipFill>
+          <a:blip r:embed="rId2"/>
+          <a:stretch>
+            <a:fillRect/>
+          </a:stretch>
+        </p:blipFill>
+        <p:spPr>
+          <a:xfrm>
+            <a:off x="1244352" y="1690688"/>
+            <a:ext cx="8601031" cy="4130009"/>
+          </a:xfrm>
+          <a:prstGeom prst="rect">
+            <a:avLst/>
+          </a:prstGeom>
+        </p:spPr>
+      </p:pic>
+    </p:spTree>
+    <p:extLst>
+      <p:ext uri="{BB962C8B-B14F-4D97-AF65-F5344CB8AC3E}">
+        <p14:creationId xmlns:p14="http://schemas.microsoft.com/office/powerpoint/2010/main" val="2614585719"/>
       </p:ext>
     </p:extLst>
   </p:cSld>

--- a/04_presentations/01_powerpoint/04_Jeroen_Ellen_Axel_17-03-25.pptx
+++ b/04_presentations/01_powerpoint/04_Jeroen_Ellen_Axel_17-03-25.pptx
@@ -21,6 +21,10 @@
     <p:sldId id="271" r:id="rId15"/>
     <p:sldId id="267" r:id="rId16"/>
     <p:sldId id="268" r:id="rId17"/>
+    <p:sldId id="272" r:id="rId18"/>
+    <p:sldId id="273" r:id="rId19"/>
+    <p:sldId id="274" r:id="rId20"/>
+    <p:sldId id="275" r:id="rId21"/>
   </p:sldIdLst>
   <p:sldSz cx="12192000" cy="6858000"/>
   <p:notesSz cx="6858000" cy="9144000"/>
@@ -274,7 +278,7 @@
           <a:p>
             <a:fld id="{5C1C5790-ED67-4BB7-8607-EA1DCC2EAB8A}" type="datetimeFigureOut">
               <a:rPr lang="en-US" smtClean="0"/>
-              <a:t>3/18/2026</a:t>
+              <a:t>3/19/2026</a:t>
             </a:fld>
             <a:endParaRPr lang="en-US"/>
           </a:p>
@@ -472,7 +476,7 @@
           <a:p>
             <a:fld id="{5C1C5790-ED67-4BB7-8607-EA1DCC2EAB8A}" type="datetimeFigureOut">
               <a:rPr lang="en-US" smtClean="0"/>
-              <a:t>3/18/2026</a:t>
+              <a:t>3/19/2026</a:t>
             </a:fld>
             <a:endParaRPr lang="en-US"/>
           </a:p>
@@ -680,7 +684,7 @@
           <a:p>
             <a:fld id="{5C1C5790-ED67-4BB7-8607-EA1DCC2EAB8A}" type="datetimeFigureOut">
               <a:rPr lang="en-US" smtClean="0"/>
-              <a:t>3/18/2026</a:t>
+              <a:t>3/19/2026</a:t>
             </a:fld>
             <a:endParaRPr lang="en-US"/>
           </a:p>
@@ -878,7 +882,7 @@
           <a:p>
             <a:fld id="{5C1C5790-ED67-4BB7-8607-EA1DCC2EAB8A}" type="datetimeFigureOut">
               <a:rPr lang="en-US" smtClean="0"/>
-              <a:t>3/18/2026</a:t>
+              <a:t>3/19/2026</a:t>
             </a:fld>
             <a:endParaRPr lang="en-US"/>
           </a:p>
@@ -1153,7 +1157,7 @@
           <a:p>
             <a:fld id="{5C1C5790-ED67-4BB7-8607-EA1DCC2EAB8A}" type="datetimeFigureOut">
               <a:rPr lang="en-US" smtClean="0"/>
-              <a:t>3/18/2026</a:t>
+              <a:t>3/19/2026</a:t>
             </a:fld>
             <a:endParaRPr lang="en-US"/>
           </a:p>
@@ -1418,7 +1422,7 @@
           <a:p>
             <a:fld id="{5C1C5790-ED67-4BB7-8607-EA1DCC2EAB8A}" type="datetimeFigureOut">
               <a:rPr lang="en-US" smtClean="0"/>
-              <a:t>3/18/2026</a:t>
+              <a:t>3/19/2026</a:t>
             </a:fld>
             <a:endParaRPr lang="en-US"/>
           </a:p>
@@ -1830,7 +1834,7 @@
           <a:p>
             <a:fld id="{5C1C5790-ED67-4BB7-8607-EA1DCC2EAB8A}" type="datetimeFigureOut">
               <a:rPr lang="en-US" smtClean="0"/>
-              <a:t>3/18/2026</a:t>
+              <a:t>3/19/2026</a:t>
             </a:fld>
             <a:endParaRPr lang="en-US"/>
           </a:p>
@@ -1971,7 +1975,7 @@
           <a:p>
             <a:fld id="{5C1C5790-ED67-4BB7-8607-EA1DCC2EAB8A}" type="datetimeFigureOut">
               <a:rPr lang="en-US" smtClean="0"/>
-              <a:t>3/18/2026</a:t>
+              <a:t>3/19/2026</a:t>
             </a:fld>
             <a:endParaRPr lang="en-US"/>
           </a:p>
@@ -2084,7 +2088,7 @@
           <a:p>
             <a:fld id="{5C1C5790-ED67-4BB7-8607-EA1DCC2EAB8A}" type="datetimeFigureOut">
               <a:rPr lang="en-US" smtClean="0"/>
-              <a:t>3/18/2026</a:t>
+              <a:t>3/19/2026</a:t>
             </a:fld>
             <a:endParaRPr lang="en-US"/>
           </a:p>
@@ -2395,7 +2399,7 @@
           <a:p>
             <a:fld id="{5C1C5790-ED67-4BB7-8607-EA1DCC2EAB8A}" type="datetimeFigureOut">
               <a:rPr lang="en-US" smtClean="0"/>
-              <a:t>3/18/2026</a:t>
+              <a:t>3/19/2026</a:t>
             </a:fld>
             <a:endParaRPr lang="en-US"/>
           </a:p>
@@ -2683,7 +2687,7 @@
           <a:p>
             <a:fld id="{5C1C5790-ED67-4BB7-8607-EA1DCC2EAB8A}" type="datetimeFigureOut">
               <a:rPr lang="en-US" smtClean="0"/>
-              <a:t>3/18/2026</a:t>
+              <a:t>3/19/2026</a:t>
             </a:fld>
             <a:endParaRPr lang="en-US"/>
           </a:p>
@@ -2924,7 +2928,7 @@
           <a:p>
             <a:fld id="{5C1C5790-ED67-4BB7-8607-EA1DCC2EAB8A}" type="datetimeFigureOut">
               <a:rPr lang="en-US" smtClean="0"/>
-              <a:t>3/18/2026</a:t>
+              <a:t>3/19/2026</a:t>
             </a:fld>
             <a:endParaRPr lang="en-US"/>
           </a:p>
@@ -5994,6 +5998,282 @@
 </p:sld>
 </file>
 
+<file path=ppt/slides/slide17.xml><?xml version="1.0" encoding="utf-8"?>
+<p:sld xmlns:a="http://schemas.openxmlformats.org/drawingml/2006/main" xmlns:r="http://schemas.openxmlformats.org/officeDocument/2006/relationships" xmlns:p="http://schemas.openxmlformats.org/presentationml/2006/main">
+  <p:cSld>
+    <p:spTree>
+      <p:nvGrpSpPr>
+        <p:cNvPr id="1" name=""/>
+        <p:cNvGrpSpPr/>
+        <p:nvPr/>
+      </p:nvGrpSpPr>
+      <p:grpSpPr>
+        <a:xfrm>
+          <a:off x="0" y="0"/>
+          <a:ext cx="0" cy="0"/>
+          <a:chOff x="0" y="0"/>
+          <a:chExt cx="0" cy="0"/>
+        </a:xfrm>
+      </p:grpSpPr>
+      <p:sp>
+        <p:nvSpPr>
+          <p:cNvPr id="2" name="Title 1">
+            <a:extLst>
+              <a:ext uri="{FF2B5EF4-FFF2-40B4-BE49-F238E27FC236}">
+                <a16:creationId xmlns:a16="http://schemas.microsoft.com/office/drawing/2014/main" id="{1AC8A361-B1F3-7E9C-5553-051AD4F338A4}"/>
+              </a:ext>
+            </a:extLst>
+          </p:cNvPr>
+          <p:cNvSpPr>
+            <a:spLocks noGrp="1"/>
+          </p:cNvSpPr>
+          <p:nvPr>
+            <p:ph type="title"/>
+          </p:nvPr>
+        </p:nvSpPr>
+        <p:spPr/>
+        <p:txBody>
+          <a:bodyPr/>
+          <a:lstStyle/>
+          <a:p>
+            <a:r>
+              <a:rPr lang="en-US" dirty="0"/>
+              <a:t>Sim study 1 (N=5000)</a:t>
+            </a:r>
+          </a:p>
+        </p:txBody>
+      </p:sp>
+      <p:pic>
+        <p:nvPicPr>
+          <p:cNvPr id="7" name="Picture 6">
+            <a:extLst>
+              <a:ext uri="{FF2B5EF4-FFF2-40B4-BE49-F238E27FC236}">
+                <a16:creationId xmlns:a16="http://schemas.microsoft.com/office/drawing/2014/main" id="{2641382C-EFA4-B327-C8A2-DCFD5787FF3A}"/>
+              </a:ext>
+            </a:extLst>
+          </p:cNvPr>
+          <p:cNvPicPr>
+            <a:picLocks noChangeAspect="1"/>
+          </p:cNvPicPr>
+          <p:nvPr/>
+        </p:nvPicPr>
+        <p:blipFill>
+          <a:blip r:embed="rId2"/>
+          <a:stretch>
+            <a:fillRect/>
+          </a:stretch>
+        </p:blipFill>
+        <p:spPr>
+          <a:xfrm>
+            <a:off x="838200" y="1536833"/>
+            <a:ext cx="6638925" cy="4419600"/>
+          </a:xfrm>
+          <a:prstGeom prst="rect">
+            <a:avLst/>
+          </a:prstGeom>
+        </p:spPr>
+      </p:pic>
+    </p:spTree>
+    <p:extLst>
+      <p:ext uri="{BB962C8B-B14F-4D97-AF65-F5344CB8AC3E}">
+        <p14:creationId xmlns:p14="http://schemas.microsoft.com/office/powerpoint/2010/main" val="3450178542"/>
+      </p:ext>
+    </p:extLst>
+  </p:cSld>
+  <p:clrMapOvr>
+    <a:masterClrMapping/>
+  </p:clrMapOvr>
+</p:sld>
+</file>
+
+<file path=ppt/slides/slide18.xml><?xml version="1.0" encoding="utf-8"?>
+<p:sld xmlns:a="http://schemas.openxmlformats.org/drawingml/2006/main" xmlns:r="http://schemas.openxmlformats.org/officeDocument/2006/relationships" xmlns:p="http://schemas.openxmlformats.org/presentationml/2006/main">
+  <p:cSld>
+    <p:spTree>
+      <p:nvGrpSpPr>
+        <p:cNvPr id="1" name="">
+          <a:extLst>
+            <a:ext uri="{FF2B5EF4-FFF2-40B4-BE49-F238E27FC236}">
+              <a16:creationId xmlns:a16="http://schemas.microsoft.com/office/drawing/2014/main" id="{7C8D0299-FAFC-A03F-481E-B3C0BC6EC255}"/>
+            </a:ext>
+          </a:extLst>
+        </p:cNvPr>
+        <p:cNvGrpSpPr/>
+        <p:nvPr/>
+      </p:nvGrpSpPr>
+      <p:grpSpPr>
+        <a:xfrm>
+          <a:off x="0" y="0"/>
+          <a:ext cx="0" cy="0"/>
+          <a:chOff x="0" y="0"/>
+          <a:chExt cx="0" cy="0"/>
+        </a:xfrm>
+      </p:grpSpPr>
+      <p:sp>
+        <p:nvSpPr>
+          <p:cNvPr id="2" name="Title 1">
+            <a:extLst>
+              <a:ext uri="{FF2B5EF4-FFF2-40B4-BE49-F238E27FC236}">
+                <a16:creationId xmlns:a16="http://schemas.microsoft.com/office/drawing/2014/main" id="{4F9F8A9E-14D9-D709-DC92-65F3C70C2612}"/>
+              </a:ext>
+            </a:extLst>
+          </p:cNvPr>
+          <p:cNvSpPr>
+            <a:spLocks noGrp="1"/>
+          </p:cNvSpPr>
+          <p:nvPr>
+            <p:ph type="title"/>
+          </p:nvPr>
+        </p:nvSpPr>
+        <p:spPr/>
+        <p:txBody>
+          <a:bodyPr/>
+          <a:lstStyle/>
+          <a:p>
+            <a:r>
+              <a:rPr lang="en-US" dirty="0"/>
+              <a:t>Sim study 1 (N=5000)</a:t>
+            </a:r>
+          </a:p>
+        </p:txBody>
+      </p:sp>
+      <p:pic>
+        <p:nvPicPr>
+          <p:cNvPr id="4" name="Picture 3">
+            <a:extLst>
+              <a:ext uri="{FF2B5EF4-FFF2-40B4-BE49-F238E27FC236}">
+                <a16:creationId xmlns:a16="http://schemas.microsoft.com/office/drawing/2014/main" id="{99F1A2A1-A555-F875-FF7A-76A210E23B39}"/>
+              </a:ext>
+            </a:extLst>
+          </p:cNvPr>
+          <p:cNvPicPr>
+            <a:picLocks noChangeAspect="1"/>
+          </p:cNvPicPr>
+          <p:nvPr/>
+        </p:nvPicPr>
+        <p:blipFill>
+          <a:blip r:embed="rId2"/>
+          <a:stretch>
+            <a:fillRect/>
+          </a:stretch>
+        </p:blipFill>
+        <p:spPr>
+          <a:xfrm>
+            <a:off x="838200" y="1556084"/>
+            <a:ext cx="6638925" cy="4419600"/>
+          </a:xfrm>
+          <a:prstGeom prst="rect">
+            <a:avLst/>
+          </a:prstGeom>
+        </p:spPr>
+      </p:pic>
+    </p:spTree>
+    <p:extLst>
+      <p:ext uri="{BB962C8B-B14F-4D97-AF65-F5344CB8AC3E}">
+        <p14:creationId xmlns:p14="http://schemas.microsoft.com/office/powerpoint/2010/main" val="2417137567"/>
+      </p:ext>
+    </p:extLst>
+  </p:cSld>
+  <p:clrMapOvr>
+    <a:masterClrMapping/>
+  </p:clrMapOvr>
+</p:sld>
+</file>
+
+<file path=ppt/slides/slide19.xml><?xml version="1.0" encoding="utf-8"?>
+<p:sld xmlns:a="http://schemas.openxmlformats.org/drawingml/2006/main" xmlns:r="http://schemas.openxmlformats.org/officeDocument/2006/relationships" xmlns:p="http://schemas.openxmlformats.org/presentationml/2006/main">
+  <p:cSld>
+    <p:spTree>
+      <p:nvGrpSpPr>
+        <p:cNvPr id="1" name="">
+          <a:extLst>
+            <a:ext uri="{FF2B5EF4-FFF2-40B4-BE49-F238E27FC236}">
+              <a16:creationId xmlns:a16="http://schemas.microsoft.com/office/drawing/2014/main" id="{B4E3E4A2-F389-BE76-FEB3-7E13A659FD30}"/>
+            </a:ext>
+          </a:extLst>
+        </p:cNvPr>
+        <p:cNvGrpSpPr/>
+        <p:nvPr/>
+      </p:nvGrpSpPr>
+      <p:grpSpPr>
+        <a:xfrm>
+          <a:off x="0" y="0"/>
+          <a:ext cx="0" cy="0"/>
+          <a:chOff x="0" y="0"/>
+          <a:chExt cx="0" cy="0"/>
+        </a:xfrm>
+      </p:grpSpPr>
+      <p:sp>
+        <p:nvSpPr>
+          <p:cNvPr id="2" name="Title 1">
+            <a:extLst>
+              <a:ext uri="{FF2B5EF4-FFF2-40B4-BE49-F238E27FC236}">
+                <a16:creationId xmlns:a16="http://schemas.microsoft.com/office/drawing/2014/main" id="{B0F3C417-A184-9EA5-9F88-49FC34DD3C18}"/>
+              </a:ext>
+            </a:extLst>
+          </p:cNvPr>
+          <p:cNvSpPr>
+            <a:spLocks noGrp="1"/>
+          </p:cNvSpPr>
+          <p:nvPr>
+            <p:ph type="title"/>
+          </p:nvPr>
+        </p:nvSpPr>
+        <p:spPr/>
+        <p:txBody>
+          <a:bodyPr/>
+          <a:lstStyle/>
+          <a:p>
+            <a:r>
+              <a:rPr lang="en-US" dirty="0"/>
+              <a:t>Sim study 2 (N=300)</a:t>
+            </a:r>
+          </a:p>
+        </p:txBody>
+      </p:sp>
+      <p:pic>
+        <p:nvPicPr>
+          <p:cNvPr id="4" name="Picture 3">
+            <a:extLst>
+              <a:ext uri="{FF2B5EF4-FFF2-40B4-BE49-F238E27FC236}">
+                <a16:creationId xmlns:a16="http://schemas.microsoft.com/office/drawing/2014/main" id="{9B57D636-ABD2-401D-1850-05335403D063}"/>
+              </a:ext>
+            </a:extLst>
+          </p:cNvPr>
+          <p:cNvPicPr>
+            <a:picLocks noChangeAspect="1"/>
+          </p:cNvPicPr>
+          <p:nvPr/>
+        </p:nvPicPr>
+        <p:blipFill>
+          <a:blip r:embed="rId2"/>
+          <a:stretch>
+            <a:fillRect/>
+          </a:stretch>
+        </p:blipFill>
+        <p:spPr>
+          <a:xfrm>
+            <a:off x="770152" y="1654593"/>
+            <a:ext cx="6638925" cy="4419600"/>
+          </a:xfrm>
+          <a:prstGeom prst="rect">
+            <a:avLst/>
+          </a:prstGeom>
+        </p:spPr>
+      </p:pic>
+    </p:spTree>
+    <p:extLst>
+      <p:ext uri="{BB962C8B-B14F-4D97-AF65-F5344CB8AC3E}">
+        <p14:creationId xmlns:p14="http://schemas.microsoft.com/office/powerpoint/2010/main" val="3803704947"/>
+      </p:ext>
+    </p:extLst>
+  </p:cSld>
+  <p:clrMapOvr>
+    <a:masterClrMapping/>
+  </p:clrMapOvr>
+</p:sld>
+</file>
+
 <file path=ppt/slides/slide2.xml><?xml version="1.0" encoding="utf-8"?>
 <p:sld xmlns:a="http://schemas.openxmlformats.org/drawingml/2006/main" xmlns:r="http://schemas.openxmlformats.org/officeDocument/2006/relationships" xmlns:p="http://schemas.openxmlformats.org/presentationml/2006/main">
   <p:cSld>
@@ -6165,6 +6445,100 @@
     <p:extLst>
       <p:ext uri="{BB962C8B-B14F-4D97-AF65-F5344CB8AC3E}">
         <p14:creationId xmlns:p14="http://schemas.microsoft.com/office/powerpoint/2010/main" val="2834703173"/>
+      </p:ext>
+    </p:extLst>
+  </p:cSld>
+  <p:clrMapOvr>
+    <a:masterClrMapping/>
+  </p:clrMapOvr>
+</p:sld>
+</file>
+
+<file path=ppt/slides/slide20.xml><?xml version="1.0" encoding="utf-8"?>
+<p:sld xmlns:a="http://schemas.openxmlformats.org/drawingml/2006/main" xmlns:r="http://schemas.openxmlformats.org/officeDocument/2006/relationships" xmlns:p="http://schemas.openxmlformats.org/presentationml/2006/main">
+  <p:cSld>
+    <p:spTree>
+      <p:nvGrpSpPr>
+        <p:cNvPr id="1" name="">
+          <a:extLst>
+            <a:ext uri="{FF2B5EF4-FFF2-40B4-BE49-F238E27FC236}">
+              <a16:creationId xmlns:a16="http://schemas.microsoft.com/office/drawing/2014/main" id="{F6521FFE-3E1F-BA35-547E-8E21C39DF329}"/>
+            </a:ext>
+          </a:extLst>
+        </p:cNvPr>
+        <p:cNvGrpSpPr/>
+        <p:nvPr/>
+      </p:nvGrpSpPr>
+      <p:grpSpPr>
+        <a:xfrm>
+          <a:off x="0" y="0"/>
+          <a:ext cx="0" cy="0"/>
+          <a:chOff x="0" y="0"/>
+          <a:chExt cx="0" cy="0"/>
+        </a:xfrm>
+      </p:grpSpPr>
+      <p:sp>
+        <p:nvSpPr>
+          <p:cNvPr id="2" name="Title 1">
+            <a:extLst>
+              <a:ext uri="{FF2B5EF4-FFF2-40B4-BE49-F238E27FC236}">
+                <a16:creationId xmlns:a16="http://schemas.microsoft.com/office/drawing/2014/main" id="{92D8819C-D6F2-28D5-8993-9341643E968D}"/>
+              </a:ext>
+            </a:extLst>
+          </p:cNvPr>
+          <p:cNvSpPr>
+            <a:spLocks noGrp="1"/>
+          </p:cNvSpPr>
+          <p:nvPr>
+            <p:ph type="title"/>
+          </p:nvPr>
+        </p:nvSpPr>
+        <p:spPr/>
+        <p:txBody>
+          <a:bodyPr/>
+          <a:lstStyle/>
+          <a:p>
+            <a:r>
+              <a:rPr lang="en-US" dirty="0"/>
+              <a:t>Sim study 2 (N=300)</a:t>
+            </a:r>
+          </a:p>
+        </p:txBody>
+      </p:sp>
+      <p:pic>
+        <p:nvPicPr>
+          <p:cNvPr id="5" name="Picture 4">
+            <a:extLst>
+              <a:ext uri="{FF2B5EF4-FFF2-40B4-BE49-F238E27FC236}">
+                <a16:creationId xmlns:a16="http://schemas.microsoft.com/office/drawing/2014/main" id="{2F380DC3-E7CD-0174-8062-EE3D8FA7113B}"/>
+              </a:ext>
+            </a:extLst>
+          </p:cNvPr>
+          <p:cNvPicPr>
+            <a:picLocks noChangeAspect="1"/>
+          </p:cNvPicPr>
+          <p:nvPr/>
+        </p:nvPicPr>
+        <p:blipFill>
+          <a:blip r:embed="rId2"/>
+          <a:stretch>
+            <a:fillRect/>
+          </a:stretch>
+        </p:blipFill>
+        <p:spPr>
+          <a:xfrm>
+            <a:off x="838200" y="1517584"/>
+            <a:ext cx="6638925" cy="4419600"/>
+          </a:xfrm>
+          <a:prstGeom prst="rect">
+            <a:avLst/>
+          </a:prstGeom>
+        </p:spPr>
+      </p:pic>
+    </p:spTree>
+    <p:extLst>
+      <p:ext uri="{BB962C8B-B14F-4D97-AF65-F5344CB8AC3E}">
+        <p14:creationId xmlns:p14="http://schemas.microsoft.com/office/powerpoint/2010/main" val="2294117833"/>
       </p:ext>
     </p:extLst>
   </p:cSld>
